--- a/Week 2/The Foundation - Week 2.pptx
+++ b/Week 2/The Foundation - Week 2.pptx
@@ -2,65 +2,65 @@
 <file path=ppt/presentation.xml><?xml version="1.0" encoding="utf-8"?>
 <p:presentation xmlns:p="http://schemas.openxmlformats.org/presentationml/2006/main" embedTrueTypeFonts="1" saveSubsetFonts="0">
   <p:sldMasterIdLst>
-    <p:sldMasterId xmlns:r="http://schemas.openxmlformats.org/officeDocument/2006/relationships" id="2147483648" r:id="Rab3f1b0da2524585"/>
+    <p:sldMasterId xmlns:r="http://schemas.openxmlformats.org/officeDocument/2006/relationships" id="2147483648" r:id="R5feb581a086d432e"/>
   </p:sldMasterIdLst>
   <p:notesMasterIdLst>
-    <p:notesMasterId xmlns:r="http://schemas.openxmlformats.org/officeDocument/2006/relationships" r:id="R092778edf6f34245"/>
+    <p:notesMasterId xmlns:r="http://schemas.openxmlformats.org/officeDocument/2006/relationships" r:id="Rbf7214f97f4847b5"/>
   </p:notesMasterIdLst>
   <p:sldIdLst>
-    <p:sldId xmlns:r="http://schemas.openxmlformats.org/officeDocument/2006/relationships" id="256" r:id="Rcd2acd4f37834423"/>
-    <p:sldId xmlns:r="http://schemas.openxmlformats.org/officeDocument/2006/relationships" id="257" r:id="Rcc30b26d803a4d29"/>
-    <p:sldId xmlns:r="http://schemas.openxmlformats.org/officeDocument/2006/relationships" id="258" r:id="R1323e62c41d649e2"/>
-    <p:sldId xmlns:r="http://schemas.openxmlformats.org/officeDocument/2006/relationships" id="259" r:id="R68fb62fd5a474049"/>
-    <p:sldId xmlns:r="http://schemas.openxmlformats.org/officeDocument/2006/relationships" id="260" r:id="R78c1a1e6351e469c"/>
-    <p:sldId xmlns:r="http://schemas.openxmlformats.org/officeDocument/2006/relationships" id="261" r:id="R7062fadd2e1c4ec3"/>
-    <p:sldId xmlns:r="http://schemas.openxmlformats.org/officeDocument/2006/relationships" id="262" r:id="R983746114f9f4c77"/>
-    <p:sldId xmlns:r="http://schemas.openxmlformats.org/officeDocument/2006/relationships" id="263" r:id="R3a6b07ddf1c5422e"/>
-    <p:sldId xmlns:r="http://schemas.openxmlformats.org/officeDocument/2006/relationships" id="264" r:id="Ra3e016403ebb4e2b"/>
-    <p:sldId xmlns:r="http://schemas.openxmlformats.org/officeDocument/2006/relationships" id="265" r:id="R06eb7a514d17455f"/>
-    <p:sldId xmlns:r="http://schemas.openxmlformats.org/officeDocument/2006/relationships" id="266" r:id="R93ece6a46ac54bec"/>
-    <p:sldId xmlns:r="http://schemas.openxmlformats.org/officeDocument/2006/relationships" id="267" r:id="Rbdda6ac245a24b2f"/>
-    <p:sldId xmlns:r="http://schemas.openxmlformats.org/officeDocument/2006/relationships" id="268" r:id="R7a18c7e585aa4ba9"/>
-    <p:sldId xmlns:r="http://schemas.openxmlformats.org/officeDocument/2006/relationships" id="269" r:id="R6ccafdbb5ef042c3"/>
-    <p:sldId xmlns:r="http://schemas.openxmlformats.org/officeDocument/2006/relationships" id="270" r:id="R377aad8417714627"/>
-    <p:sldId xmlns:r="http://schemas.openxmlformats.org/officeDocument/2006/relationships" id="271" r:id="R57f154d763664e46"/>
-    <p:sldId xmlns:r="http://schemas.openxmlformats.org/officeDocument/2006/relationships" id="272" r:id="Re00c5964ba414208"/>
-    <p:sldId xmlns:r="http://schemas.openxmlformats.org/officeDocument/2006/relationships" id="273" r:id="R8ea2e248fd104ae0"/>
+    <p:sldId xmlns:r="http://schemas.openxmlformats.org/officeDocument/2006/relationships" id="256" r:id="R9d9e3d5460e7480c"/>
+    <p:sldId xmlns:r="http://schemas.openxmlformats.org/officeDocument/2006/relationships" id="257" r:id="R8f707b4a721b4479"/>
+    <p:sldId xmlns:r="http://schemas.openxmlformats.org/officeDocument/2006/relationships" id="258" r:id="Rd5d40da366e04537"/>
+    <p:sldId xmlns:r="http://schemas.openxmlformats.org/officeDocument/2006/relationships" id="259" r:id="R2f357952955f4b83"/>
+    <p:sldId xmlns:r="http://schemas.openxmlformats.org/officeDocument/2006/relationships" id="260" r:id="Rab8a1b6c927e4b1d"/>
+    <p:sldId xmlns:r="http://schemas.openxmlformats.org/officeDocument/2006/relationships" id="261" r:id="Re5ec6f5c4b1d42b8"/>
+    <p:sldId xmlns:r="http://schemas.openxmlformats.org/officeDocument/2006/relationships" id="262" r:id="R1b50703dd78743b3"/>
+    <p:sldId xmlns:r="http://schemas.openxmlformats.org/officeDocument/2006/relationships" id="263" r:id="R3baeb332c3094f7c"/>
+    <p:sldId xmlns:r="http://schemas.openxmlformats.org/officeDocument/2006/relationships" id="264" r:id="R4fa1da0cfea24b3d"/>
+    <p:sldId xmlns:r="http://schemas.openxmlformats.org/officeDocument/2006/relationships" id="265" r:id="R6cb762a2636c40cd"/>
+    <p:sldId xmlns:r="http://schemas.openxmlformats.org/officeDocument/2006/relationships" id="266" r:id="R5bfc1d7bf6d24cb8"/>
+    <p:sldId xmlns:r="http://schemas.openxmlformats.org/officeDocument/2006/relationships" id="267" r:id="R11305946ed104498"/>
+    <p:sldId xmlns:r="http://schemas.openxmlformats.org/officeDocument/2006/relationships" id="268" r:id="R8444c7ea84004d0f"/>
+    <p:sldId xmlns:r="http://schemas.openxmlformats.org/officeDocument/2006/relationships" id="269" r:id="Rd883f675994d4560"/>
+    <p:sldId xmlns:r="http://schemas.openxmlformats.org/officeDocument/2006/relationships" id="270" r:id="R56702de8719c4fed"/>
+    <p:sldId xmlns:r="http://schemas.openxmlformats.org/officeDocument/2006/relationships" id="271" r:id="R3ac748d5ae7e4008"/>
+    <p:sldId xmlns:r="http://schemas.openxmlformats.org/officeDocument/2006/relationships" id="272" r:id="Re42906b0e5b64d48"/>
+    <p:sldId xmlns:r="http://schemas.openxmlformats.org/officeDocument/2006/relationships" id="273" r:id="R1603ddcd000341ab"/>
   </p:sldIdLst>
   <p:sldSz cx="12192000" cy="6858000"/>
   <p:notesSz cx="6858000" cy="9144000"/>
   <p:embeddedFontLst>
     <p:embeddedFont>
       <p:font typeface="Adobe Garamond Pro Bold"/>
-      <p:bold xmlns:r="http://schemas.openxmlformats.org/officeDocument/2006/relationships" r:id="R01b93ee4dfe54d7b"/>
-      <p:italic xmlns:r="http://schemas.openxmlformats.org/officeDocument/2006/relationships" r:id="Ra27174c7498e42be"/>
-      <p:boldItalic xmlns:r="http://schemas.openxmlformats.org/officeDocument/2006/relationships" r:id="R176dda8cf18a47dd"/>
+      <p:bold xmlns:r="http://schemas.openxmlformats.org/officeDocument/2006/relationships" r:id="Rb7661c16926f4914"/>
+      <p:italic xmlns:r="http://schemas.openxmlformats.org/officeDocument/2006/relationships" r:id="R742d12f589d64c79"/>
+      <p:boldItalic xmlns:r="http://schemas.openxmlformats.org/officeDocument/2006/relationships" r:id="Ra578462e2ee14368"/>
     </p:embeddedFont>
     <p:embeddedFont>
       <p:font typeface="Apex New Book"/>
-      <p:regular xmlns:r="http://schemas.openxmlformats.org/officeDocument/2006/relationships" r:id="R16c8a975b5994684"/>
+      <p:regular xmlns:r="http://schemas.openxmlformats.org/officeDocument/2006/relationships" r:id="R9807f388d02e4ce8"/>
     </p:embeddedFont>
     <p:embeddedFont>
       <p:font typeface="Apex New Book Italic"/>
-      <p:italic xmlns:r="http://schemas.openxmlformats.org/officeDocument/2006/relationships" r:id="R150e751318254eb0"/>
+      <p:italic xmlns:r="http://schemas.openxmlformats.org/officeDocument/2006/relationships" r:id="R1bf628f93a9741b9"/>
     </p:embeddedFont>
     <p:embeddedFont>
       <p:font typeface="Apex New Light"/>
-      <p:regular xmlns:r="http://schemas.openxmlformats.org/officeDocument/2006/relationships" r:id="Redaffece090f4d10"/>
+      <p:regular xmlns:r="http://schemas.openxmlformats.org/officeDocument/2006/relationships" r:id="Rdace27c09ada489d"/>
     </p:embeddedFont>
     <p:embeddedFont>
       <p:font typeface="Century Gothic"/>
-      <p:regular xmlns:r="http://schemas.openxmlformats.org/officeDocument/2006/relationships" r:id="Rc51833fe382c4c54"/>
-      <p:bold xmlns:r="http://schemas.openxmlformats.org/officeDocument/2006/relationships" r:id="Ra113ae790056447e"/>
-      <p:italic xmlns:r="http://schemas.openxmlformats.org/officeDocument/2006/relationships" r:id="Rfc8e230e616a4be3"/>
-      <p:boldItalic xmlns:r="http://schemas.openxmlformats.org/officeDocument/2006/relationships" r:id="R0d0dbe6949e04ae6"/>
+      <p:regular xmlns:r="http://schemas.openxmlformats.org/officeDocument/2006/relationships" r:id="R5cd6063a6d754281"/>
+      <p:bold xmlns:r="http://schemas.openxmlformats.org/officeDocument/2006/relationships" r:id="R4bb05b81c57f4e76"/>
+      <p:italic xmlns:r="http://schemas.openxmlformats.org/officeDocument/2006/relationships" r:id="R41604e1b89b647fb"/>
+      <p:boldItalic xmlns:r="http://schemas.openxmlformats.org/officeDocument/2006/relationships" r:id="R8a3d2fd8da7f492f"/>
     </p:embeddedFont>
     <p:embeddedFont>
       <p:font typeface="Garamond"/>
-      <p:regular xmlns:r="http://schemas.openxmlformats.org/officeDocument/2006/relationships" r:id="Rc7eecb11cc4c49cd"/>
-      <p:bold xmlns:r="http://schemas.openxmlformats.org/officeDocument/2006/relationships" r:id="Rc63b58223e3e46af"/>
-      <p:italic xmlns:r="http://schemas.openxmlformats.org/officeDocument/2006/relationships" r:id="Rde564d9ea6d949af"/>
-      <p:boldItalic xmlns:r="http://schemas.openxmlformats.org/officeDocument/2006/relationships" r:id="Rff682cfdfd4e4748"/>
+      <p:regular xmlns:r="http://schemas.openxmlformats.org/officeDocument/2006/relationships" r:id="R4219f6b58f6a497b"/>
+      <p:bold xmlns:r="http://schemas.openxmlformats.org/officeDocument/2006/relationships" r:id="Rbd73774ad1b9489a"/>
+      <p:italic xmlns:r="http://schemas.openxmlformats.org/officeDocument/2006/relationships" r:id="R8d101272249540e0"/>
+      <p:boldItalic xmlns:r="http://schemas.openxmlformats.org/officeDocument/2006/relationships" r:id="Radd4219616f845c6"/>
     </p:embeddedFont>
   </p:embeddedFontLst>
 </p:presentation>
@@ -2707,7 +2707,7 @@
           <p:cNvPr id="9" name="Straight Connector 8">
             <a:extLst xmlns:a="http://schemas.openxmlformats.org/drawingml/2006/main">
               <a:ext uri="{FF2B5EF4-FFF2-40B4-BE49-F238E27FC236}">
-                <a16:creationId xmlns:a16="http://schemas.microsoft.com/office/drawing/2014/main" id="{5234DA85-E173-47E0-9D7E-1F973D0E2F50}"/>
+                <a16:creationId xmlns:a16="http://schemas.microsoft.com/office/drawing/2014/main" id="{6E3D3FC0-AD25-4F74-B9CA-3277E34C0762}"/>
               </a:ext>
             </a:extLst>
           </p:cNvPr>
@@ -2750,7 +2750,7 @@
           <p:cNvPr id="11" name="Straight Connector 10">
             <a:extLst xmlns:a="http://schemas.openxmlformats.org/drawingml/2006/main">
               <a:ext uri="{FF2B5EF4-FFF2-40B4-BE49-F238E27FC236}">
-                <a16:creationId xmlns:a16="http://schemas.microsoft.com/office/drawing/2014/main" id="{6FCAF9A7-C3AB-4FA5-82AB-0067F5C76B0A}"/>
+                <a16:creationId xmlns:a16="http://schemas.microsoft.com/office/drawing/2014/main" id="{348AFD6C-D6C8-40BA-B4C6-58CD4072FE3B}"/>
               </a:ext>
             </a:extLst>
           </p:cNvPr>
@@ -2797,7 +2797,7 @@
           <p:nvPr/>
         </p:nvPicPr>
         <p:blipFill>
-          <a:blip xmlns:r="http://schemas.openxmlformats.org/officeDocument/2006/relationships" xmlns:a="http://schemas.openxmlformats.org/drawingml/2006/main" r:embed="Re1c41935184a4a31"/>
+          <a:blip xmlns:r="http://schemas.openxmlformats.org/officeDocument/2006/relationships" xmlns:a="http://schemas.openxmlformats.org/drawingml/2006/main" r:embed="R08889bfeb445475d"/>
           <a:stretch xmlns:a="http://schemas.openxmlformats.org/drawingml/2006/main">
             <a:fillRect l="0" t="0" r="0" b="0"/>
           </a:stretch>
@@ -2816,13 +2816,13 @@
   </p:cSld>
   <p:clrMap bg1="lt1" tx1="dk1" bg2="lt2" tx2="dk2" accent1="accent1" accent2="accent2" accent3="accent3" accent4="accent4" accent5="accent5" accent6="accent6" hlink="hlink" folHlink="folHlink"/>
   <p:sldLayoutIdLst>
-    <p:sldLayoutId xmlns:r="http://schemas.openxmlformats.org/officeDocument/2006/relationships" id="2147483649" r:id="Rfee6f260879d4cab"/>
-    <p:sldLayoutId xmlns:r="http://schemas.openxmlformats.org/officeDocument/2006/relationships" id="2147483650" r:id="R7d5e735bfca147c3"/>
-    <p:sldLayoutId xmlns:r="http://schemas.openxmlformats.org/officeDocument/2006/relationships" id="2147483651" r:id="Re6a7219c5b8748f4"/>
-    <p:sldLayoutId xmlns:r="http://schemas.openxmlformats.org/officeDocument/2006/relationships" id="2147483652" r:id="R7555659addd24cf1"/>
-    <p:sldLayoutId xmlns:r="http://schemas.openxmlformats.org/officeDocument/2006/relationships" id="2147483653" r:id="Re6087afedbeb4241"/>
-    <p:sldLayoutId xmlns:r="http://schemas.openxmlformats.org/officeDocument/2006/relationships" id="2147483654" r:id="R20c078ad94734dca"/>
-    <p:sldLayoutId xmlns:r="http://schemas.openxmlformats.org/officeDocument/2006/relationships" id="2147483655" r:id="R02b33391a3754edd"/>
+    <p:sldLayoutId xmlns:r="http://schemas.openxmlformats.org/officeDocument/2006/relationships" id="2147483649" r:id="R081e799ccf6a43ce"/>
+    <p:sldLayoutId xmlns:r="http://schemas.openxmlformats.org/officeDocument/2006/relationships" id="2147483650" r:id="Rce47aa6e843c4e97"/>
+    <p:sldLayoutId xmlns:r="http://schemas.openxmlformats.org/officeDocument/2006/relationships" id="2147483651" r:id="R32e378899376487d"/>
+    <p:sldLayoutId xmlns:r="http://schemas.openxmlformats.org/officeDocument/2006/relationships" id="2147483652" r:id="R4514d6aeb37c4c64"/>
+    <p:sldLayoutId xmlns:r="http://schemas.openxmlformats.org/officeDocument/2006/relationships" id="2147483653" r:id="R04b60b692e8147cf"/>
+    <p:sldLayoutId xmlns:r="http://schemas.openxmlformats.org/officeDocument/2006/relationships" id="2147483654" r:id="R85baaefa1ef34b69"/>
+    <p:sldLayoutId xmlns:r="http://schemas.openxmlformats.org/officeDocument/2006/relationships" id="2147483655" r:id="R8c951265e21543f7"/>
   </p:sldLayoutIdLst>
   <p:txStyles>
     <p:titleStyle>
@@ -3415,7 +3415,7 @@
           <p:cNvPr id="4" name="Straight Connector 3">
             <a:extLst xmlns:a="http://schemas.openxmlformats.org/drawingml/2006/main">
               <a:ext uri="{FF2B5EF4-FFF2-40B4-BE49-F238E27FC236}">
-                <a16:creationId xmlns:a16="http://schemas.microsoft.com/office/drawing/2014/main" id="{2EB79324-F902-41F7-80C6-0DF2DAA3B010}"/>
+                <a16:creationId xmlns:a16="http://schemas.microsoft.com/office/drawing/2014/main" id="{2B75C523-96A6-42FB-AF9C-BA86C2733C44}"/>
               </a:ext>
             </a:extLst>
           </p:cNvPr>
@@ -3458,7 +3458,7 @@
           <p:cNvPr id="5" name="Straight Connector 4">
             <a:extLst xmlns:a="http://schemas.openxmlformats.org/drawingml/2006/main">
               <a:ext uri="{FF2B5EF4-FFF2-40B4-BE49-F238E27FC236}">
-                <a16:creationId xmlns:a16="http://schemas.microsoft.com/office/drawing/2014/main" id="{B491B3CE-AC70-4718-87C3-226B7424E111}"/>
+                <a16:creationId xmlns:a16="http://schemas.microsoft.com/office/drawing/2014/main" id="{C9FE3154-DF5D-4E4B-82BA-2D1786C59F9A}"/>
               </a:ext>
             </a:extLst>
           </p:cNvPr>
@@ -3505,7 +3505,7 @@
           <p:nvPr/>
         </p:nvPicPr>
         <p:blipFill rotWithShape="1">
-          <a:blip xmlns:r="http://schemas.openxmlformats.org/officeDocument/2006/relationships" xmlns:a="http://schemas.openxmlformats.org/drawingml/2006/main" r:embed="R386f6a2a0c02460e">
+          <a:blip xmlns:r="http://schemas.openxmlformats.org/officeDocument/2006/relationships" xmlns:a="http://schemas.openxmlformats.org/drawingml/2006/main" r:embed="Raf2793311eca4769">
             <a:grayscl/>
             <a:alphaModFix amt="27000"/>
           </a:blip>
@@ -3606,7 +3606,7 @@
           <p:cNvPr id="4" name="TextBox 3">
             <a:extLst xmlns:a="http://schemas.openxmlformats.org/drawingml/2006/main">
               <a:ext uri="{FF2B5EF4-FFF2-40B4-BE49-F238E27FC236}">
-                <a16:creationId xmlns:a16="http://schemas.microsoft.com/office/drawing/2014/main" id="{C7B19C96-5D82-012F-8729-3E6D9E53B949}"/>
+                <a16:creationId xmlns:a16="http://schemas.microsoft.com/office/drawing/2014/main" id="{CC6A4120-A6E9-C201-2822-99E980DEAA23}"/>
               </a:ext>
             </a:extLst>
           </p:cNvPr>
@@ -3617,8 +3617,8 @@
         </p:nvSpPr>
         <p:spPr>
           <a:xfrm xmlns:a="http://schemas.openxmlformats.org/drawingml/2006/main">
-            <a:off x="803190" y="407773"/>
-            <a:ext cx="5609967" cy="1615440"/>
+            <a:off x="506626" y="430118"/>
+            <a:ext cx="10625199" cy="861774"/>
           </a:xfrm>
           <a:prstGeom xmlns:a="http://schemas.openxmlformats.org/drawingml/2006/main" prst="rect">
             <a:avLst/>
@@ -3632,9 +3632,9 @@
           <a:lstStyle xmlns:a="http://schemas.openxmlformats.org/drawingml/2006/main"/>
           <a:p xmlns:a="http://schemas.openxmlformats.org/drawingml/2006/main">
             <a:r>
-              <a:rPr sz="5000" b="1">
+              <a:rPr sz="5000" b="1" spc="-150">
                 <a:solidFill>
-                  <a:srgbClr val="00637C"/>
+                  <a:schemeClr val="accent2"/>
                 </a:solidFill>
                 <a:latin typeface="Century Gothic"/>
                 <a:ea typeface="Century Gothic"/>
@@ -3647,10 +3647,10 @@
       </p:sp>
       <p:sp>
         <p:nvSpPr>
-          <p:cNvPr id="5" name="TextBox 4">
+          <p:cNvPr id="8" name="TextBox 7">
             <a:extLst xmlns:a="http://schemas.openxmlformats.org/drawingml/2006/main">
               <a:ext uri="{FF2B5EF4-FFF2-40B4-BE49-F238E27FC236}">
-                <a16:creationId xmlns:a16="http://schemas.microsoft.com/office/drawing/2014/main" id="{F511E7B9-E7CA-19FE-E051-E69B2B8DF370}"/>
+                <a16:creationId xmlns:a16="http://schemas.microsoft.com/office/drawing/2014/main" id="{158774D9-74C1-3786-BA30-6C2B11D8E6B7}"/>
               </a:ext>
             </a:extLst>
           </p:cNvPr>
@@ -3661,8 +3661,8 @@
         </p:nvSpPr>
         <p:spPr>
           <a:xfrm xmlns:a="http://schemas.openxmlformats.org/drawingml/2006/main">
-            <a:off x="2478593" y="2589357"/>
-            <a:ext cx="7705929" cy="1384995"/>
+            <a:off x="1360238" y="3611687"/>
+            <a:ext cx="6722075" cy="1200329"/>
           </a:xfrm>
           <a:prstGeom xmlns:a="http://schemas.openxmlformats.org/drawingml/2006/main" prst="rect">
             <a:avLst/>
@@ -3675,35 +3675,21 @@
           </a:bodyPr>
           <a:lstStyle xmlns:a="http://schemas.openxmlformats.org/drawingml/2006/main"/>
           <a:p xmlns:a="http://schemas.openxmlformats.org/drawingml/2006/main">
-            <a:pPr algn="ctr">
-              <a:buNone/>
-            </a:pPr>
-            <a:r>
-              <a:rPr sz="2800" b="1">
-                <a:solidFill>
-                  <a:srgbClr val="00637C"/>
-                </a:solidFill>
-                <a:latin typeface="Adobe Garamond Pro Bold"/>
-                <a:ea typeface="Adobe Garamond Pro Bold"/>
-                <a:cs typeface="Adobe Garamond Pro Bold"/>
+            <a:r>
+              <a:rPr sz="2400">
+                <a:latin typeface="Apex New Light"/>
+                <a:ea typeface="Apex New Light"/>
+                <a:cs typeface="Apex New Light"/>
               </a:rPr>
-              <a:t>State the compelling benefit in language the customer immediately understands.</a:t>
-            </a:r>
-            <a:endParaRPr sz="2800" b="1" i="1">
-              <a:solidFill>
-                <a:srgbClr val="00637C"/>
-              </a:solidFill>
-              <a:latin typeface="Adobe Garamond Pro Bold"/>
-              <a:ea typeface="Adobe Garamond Pro Bold"/>
-              <a:cs typeface="Adobe Garamond Pro Bold"/>
-            </a:endParaRPr>
+              <a:t>A unique selling proposition states the benefit that sets the product apart in language the customer understands.</a:t>
+            </a:r>
           </a:p>
         </p:txBody>
       </p:sp>
     </p:spTree>
     <p:extLst>
       <p:ext uri="{BB962C8B-B14F-4D97-AF65-F5344CB8AC3E}">
-        <p14:creationId xmlns:p14="http://schemas.microsoft.com/office/powerpoint/2010/main" val="3521556503"/>
+        <p14:creationId xmlns:p14="http://schemas.microsoft.com/office/powerpoint/2010/main" val="4178694944"/>
       </p:ext>
     </p:extLst>
   </p:cSld>
@@ -3711,7 +3697,7 @@
 </file>
 
 <file path=ppt/slides/slide11.xml><?xml version="1.0" encoding="utf-8"?>
-<p:sld xmlns:p="http://schemas.openxmlformats.org/presentationml/2006/main" showMasterSp="0">
+<p:sld xmlns:p="http://schemas.openxmlformats.org/presentationml/2006/main">
   <p:cSld>
     <p:spTree>
       <p:nvGrpSpPr>
@@ -3722,78 +3708,12 @@
       <p:grpSpPr>
         <a:xfrm xmlns:a="http://schemas.openxmlformats.org/drawingml/2006/main"/>
       </p:grpSpPr>
-      <p:pic>
-        <p:nvPicPr>
-          <p:cNvPr id="13" name="Picture 3"/>
-          <p:cNvPicPr>
-            <a:picLocks xmlns:a="http://schemas.openxmlformats.org/drawingml/2006/main" noChangeAspect="1"/>
-          </p:cNvPicPr>
-          <p:nvPr/>
-        </p:nvPicPr>
-        <p:blipFill>
-          <a:blip xmlns:r="http://schemas.openxmlformats.org/officeDocument/2006/relationships" xmlns:a="http://schemas.openxmlformats.org/drawingml/2006/main" r:embed="Rdf6cbbdb60f041c1"/>
-          <a:stretch xmlns:a="http://schemas.openxmlformats.org/drawingml/2006/main"/>
-        </p:blipFill>
-        <p:spPr>
-          <a:xfrm xmlns:a="http://schemas.openxmlformats.org/drawingml/2006/main">
-            <a:off x="5507658" y="148646"/>
-            <a:ext cx="5144219" cy="3858164"/>
-          </a:xfrm>
-          <a:prstGeom xmlns:a="http://schemas.openxmlformats.org/drawingml/2006/main" prst="rect">
-            <a:avLst/>
-          </a:prstGeom>
-        </p:spPr>
-      </p:pic>
-      <p:pic>
-        <p:nvPicPr>
-          <p:cNvPr id="14" name="Picture 4"/>
-          <p:cNvPicPr>
-            <a:picLocks xmlns:a="http://schemas.openxmlformats.org/drawingml/2006/main" noChangeAspect="1"/>
-          </p:cNvPicPr>
-          <p:nvPr/>
-        </p:nvPicPr>
-        <p:blipFill>
-          <a:blip xmlns:r="http://schemas.openxmlformats.org/officeDocument/2006/relationships" xmlns:a="http://schemas.openxmlformats.org/drawingml/2006/main" r:embed="Re04e7c40d7bf4729"/>
-          <a:stretch xmlns:a="http://schemas.openxmlformats.org/drawingml/2006/main"/>
-        </p:blipFill>
-        <p:spPr>
-          <a:xfrm xmlns:a="http://schemas.openxmlformats.org/drawingml/2006/main">
-            <a:off x="8809850" y="4121517"/>
-            <a:ext cx="2568137" cy="2568137"/>
-          </a:xfrm>
-          <a:prstGeom xmlns:a="http://schemas.openxmlformats.org/drawingml/2006/main" prst="rect">
-            <a:avLst/>
-          </a:prstGeom>
-        </p:spPr>
-      </p:pic>
-      <p:pic>
-        <p:nvPicPr>
-          <p:cNvPr id="15" name="Picture 5"/>
-          <p:cNvPicPr>
-            <a:picLocks xmlns:a="http://schemas.openxmlformats.org/drawingml/2006/main" noChangeAspect="1"/>
-          </p:cNvPicPr>
-          <p:nvPr/>
-        </p:nvPicPr>
-        <p:blipFill>
-          <a:blip xmlns:r="http://schemas.openxmlformats.org/officeDocument/2006/relationships" xmlns:a="http://schemas.openxmlformats.org/drawingml/2006/main" r:embed="R7535d88171a2493f"/>
-          <a:stretch xmlns:a="http://schemas.openxmlformats.org/drawingml/2006/main"/>
-        </p:blipFill>
-        <p:spPr>
-          <a:xfrm xmlns:a="http://schemas.openxmlformats.org/drawingml/2006/main">
-            <a:off x="4353525" y="4121517"/>
-            <a:ext cx="3424183" cy="2568137"/>
-          </a:xfrm>
-          <a:prstGeom xmlns:a="http://schemas.openxmlformats.org/drawingml/2006/main" prst="rect">
-            <a:avLst/>
-          </a:prstGeom>
-        </p:spPr>
-      </p:pic>
-      <p:sp>
-        <p:nvSpPr>
-          <p:cNvPr id="7" name="TextBox 6">
+      <p:sp>
+        <p:nvSpPr>
+          <p:cNvPr id="8" name="TextBox 7">
             <a:extLst xmlns:a="http://schemas.openxmlformats.org/drawingml/2006/main">
               <a:ext uri="{FF2B5EF4-FFF2-40B4-BE49-F238E27FC236}">
-                <a16:creationId xmlns:a16="http://schemas.microsoft.com/office/drawing/2014/main" id="{A45B6AC5-C418-CF38-7E40-075352A7766D}"/>
+                <a16:creationId xmlns:a16="http://schemas.microsoft.com/office/drawing/2014/main" id="{8B3926F2-8AD5-7582-6E88-B50737980B3A}"/>
               </a:ext>
             </a:extLst>
           </p:cNvPr>
@@ -3804,8 +3724,8 @@
         </p:nvSpPr>
         <p:spPr>
           <a:xfrm xmlns:a="http://schemas.openxmlformats.org/drawingml/2006/main">
-            <a:off x="308762" y="349509"/>
-            <a:ext cx="4773599" cy="1615440"/>
+            <a:off x="271850" y="328399"/>
+            <a:ext cx="5824150" cy="861774"/>
           </a:xfrm>
           <a:prstGeom xmlns:a="http://schemas.openxmlformats.org/drawingml/2006/main" prst="rect">
             <a:avLst/>
@@ -3842,10 +3762,10 @@
       </p:sp>
       <p:sp>
         <p:nvSpPr>
-          <p:cNvPr id="8" name="TextBox 7">
+          <p:cNvPr id="9" name="TextBox 8">
             <a:extLst xmlns:a="http://schemas.openxmlformats.org/drawingml/2006/main">
               <a:ext uri="{FF2B5EF4-FFF2-40B4-BE49-F238E27FC236}">
-                <a16:creationId xmlns:a16="http://schemas.microsoft.com/office/drawing/2014/main" id="{01BB7B6E-5A70-24FC-9876-AC1845CD1CB6}"/>
+                <a16:creationId xmlns:a16="http://schemas.microsoft.com/office/drawing/2014/main" id="{BAAE8D29-FE4E-8206-3418-E2FEA3E82E78}"/>
               </a:ext>
             </a:extLst>
           </p:cNvPr>
@@ -3856,8 +3776,8 @@
         </p:nvSpPr>
         <p:spPr>
           <a:xfrm xmlns:a="http://schemas.openxmlformats.org/drawingml/2006/main">
-            <a:off x="397740" y="1951672"/>
-            <a:ext cx="3626350" cy="2834640"/>
+            <a:off x="896369" y="2042736"/>
+            <a:ext cx="3626350" cy="1477328"/>
           </a:xfrm>
           <a:prstGeom xmlns:a="http://schemas.openxmlformats.org/drawingml/2006/main" prst="rect">
             <a:avLst/>
@@ -3876,7 +3796,7 @@
                 <a:ea typeface="Apex New Book"/>
                 <a:cs typeface="Apex New Book"/>
               </a:rPr>
-              <a:t>Identity is what the company intentionally creates.</a:t>
+              <a:t>Brand identity describes what the company creates and communicates.</a:t>
             </a:r>
           </a:p>
           <a:p xmlns:a="http://schemas.openxmlformats.org/drawingml/2006/main">
@@ -3890,69 +3810,27 @@
                 <a:ea typeface="Apex New Book"/>
                 <a:cs typeface="Apex New Book"/>
               </a:rPr>
-              <a:t/>
-            </a:r>
-          </a:p>
-          <a:p xmlns:a="http://schemas.openxmlformats.org/drawingml/2006/main">
-            <a:pPr marL="285750" indent="-285750">
-              <a:buFont typeface="Arial"/>
-              <a:buChar char="•"/>
-            </a:pPr>
-            <a:r>
-              <a:rPr>
-                <a:latin typeface="Apex New Book"/>
-                <a:ea typeface="Apex New Book"/>
-                <a:cs typeface="Apex New Book"/>
-              </a:rPr>
-              <a:t>Image is what people actually believe.</a:t>
-            </a:r>
-          </a:p>
-          <a:p xmlns:a="http://schemas.openxmlformats.org/drawingml/2006/main">
-            <a:pPr marL="285750" indent="-285750">
-              <a:buFont typeface="Arial"/>
-              <a:buChar char="•"/>
-            </a:pPr>
-            <a:r>
-              <a:rPr>
-                <a:latin typeface="Apex New Book"/>
-                <a:ea typeface="Apex New Book"/>
-                <a:cs typeface="Apex New Book"/>
-              </a:rPr>
-              <a:t/>
-            </a:r>
-          </a:p>
-          <a:p xmlns:a="http://schemas.openxmlformats.org/drawingml/2006/main">
-            <a:pPr marL="285750" indent="-285750">
-              <a:buFont typeface="Arial"/>
-              <a:buChar char="•"/>
-            </a:pPr>
-            <a:r>
-              <a:rPr>
-                <a:latin typeface="Apex New Book"/>
-                <a:ea typeface="Apex New Book"/>
-                <a:cs typeface="Apex New Book"/>
-              </a:rPr>
-              <a:t>Associations are the ideas, qualities, feelings, images, and experiences people connect to the brand.</a:t>
+              <a:t>Brand image reflects what people actually think and believe.</a:t>
             </a:r>
           </a:p>
         </p:txBody>
       </p:sp>
       <p:pic>
         <p:nvPicPr>
-          <p:cNvPr id="18" name=""/>
+          <p:cNvPr id="13" name=""/>
           <p:cNvPicPr>
             <a:picLocks xmlns:a="http://schemas.openxmlformats.org/drawingml/2006/main" noChangeAspect="1"/>
           </p:cNvPicPr>
           <p:nvPr/>
         </p:nvPicPr>
         <p:blipFill>
-          <a:blip xmlns:r="http://schemas.openxmlformats.org/officeDocument/2006/relationships" xmlns:a="http://schemas.openxmlformats.org/drawingml/2006/main" r:embed="Refe6e49c3626489d"/>
+          <a:blip xmlns:r="http://schemas.openxmlformats.org/officeDocument/2006/relationships" xmlns:a="http://schemas.openxmlformats.org/drawingml/2006/main" r:embed="R60bd6d45c25a4410"/>
           <a:stretch xmlns:a="http://schemas.openxmlformats.org/drawingml/2006/main"/>
         </p:blipFill>
         <p:spPr>
           <a:xfrm xmlns:a="http://schemas.openxmlformats.org/drawingml/2006/main">
-            <a:off x="4953000" y="571500"/>
-            <a:ext cx="6858000" cy="5143500"/>
+            <a:off x="5715000" y="881063"/>
+            <a:ext cx="5905500" cy="4429125"/>
           </a:xfrm>
           <a:prstGeom xmlns:a="http://schemas.openxmlformats.org/drawingml/2006/main" prst="rect">
             <a:avLst/>
@@ -3962,7 +3840,7 @@
     </p:spTree>
     <p:extLst>
       <p:ext uri="{BB962C8B-B14F-4D97-AF65-F5344CB8AC3E}">
-        <p14:creationId xmlns:p14="http://schemas.microsoft.com/office/powerpoint/2010/main" val="2881694829"/>
+        <p14:creationId xmlns:p14="http://schemas.microsoft.com/office/powerpoint/2010/main" val="1969607770"/>
       </p:ext>
     </p:extLst>
   </p:cSld>
@@ -4026,7 +3904,7 @@
                 <a:ea typeface="Century Gothic"/>
                 <a:cs typeface="Century Gothic"/>
               </a:rPr>
-              <a:t>SECTION 3 — THE CUSTOMER</a:t>
+              <a:t>SECTION 3: THE CUSTOMER</a:t>
             </a:r>
           </a:p>
         </p:txBody>
@@ -4073,7 +3951,7 @@
                 <a:ea typeface="Adobe Garamond Pro Bold"/>
                 <a:cs typeface="Adobe Garamond Pro Bold"/>
               </a:rPr>
-              <a:t>Turn target-market research into a vivid buyer persona and a mapped path to purchase.</a:t>
+              <a:t>Research defines the customer and maps the path to purchase.</a:t>
             </a:r>
           </a:p>
         </p:txBody>
@@ -4089,7 +3967,7 @@
 </file>
 
 <file path=ppt/slides/slide13.xml><?xml version="1.0" encoding="utf-8"?>
-<p:sld xmlns:p="http://schemas.openxmlformats.org/presentationml/2006/main" showMasterSp="0">
+<p:sld xmlns:p="http://schemas.openxmlformats.org/presentationml/2006/main">
   <p:cSld>
     <p:spTree>
       <p:nvGrpSpPr>
@@ -4100,78 +3978,12 @@
       <p:grpSpPr>
         <a:xfrm xmlns:a="http://schemas.openxmlformats.org/drawingml/2006/main"/>
       </p:grpSpPr>
-      <p:pic>
-        <p:nvPicPr>
-          <p:cNvPr id="13" name="Picture 3"/>
-          <p:cNvPicPr>
-            <a:picLocks xmlns:a="http://schemas.openxmlformats.org/drawingml/2006/main" noChangeAspect="1"/>
-          </p:cNvPicPr>
-          <p:nvPr/>
-        </p:nvPicPr>
-        <p:blipFill>
-          <a:blip xmlns:r="http://schemas.openxmlformats.org/officeDocument/2006/relationships" xmlns:a="http://schemas.openxmlformats.org/drawingml/2006/main" r:embed="R1a767703ffa94d86"/>
-          <a:stretch xmlns:a="http://schemas.openxmlformats.org/drawingml/2006/main"/>
-        </p:blipFill>
-        <p:spPr>
-          <a:xfrm xmlns:a="http://schemas.openxmlformats.org/drawingml/2006/main">
-            <a:off x="5507658" y="148646"/>
-            <a:ext cx="5144219" cy="3858164"/>
-          </a:xfrm>
-          <a:prstGeom xmlns:a="http://schemas.openxmlformats.org/drawingml/2006/main" prst="rect">
-            <a:avLst/>
-          </a:prstGeom>
-        </p:spPr>
-      </p:pic>
-      <p:pic>
-        <p:nvPicPr>
-          <p:cNvPr id="14" name="Picture 4"/>
-          <p:cNvPicPr>
-            <a:picLocks xmlns:a="http://schemas.openxmlformats.org/drawingml/2006/main" noChangeAspect="1"/>
-          </p:cNvPicPr>
-          <p:nvPr/>
-        </p:nvPicPr>
-        <p:blipFill>
-          <a:blip xmlns:r="http://schemas.openxmlformats.org/officeDocument/2006/relationships" xmlns:a="http://schemas.openxmlformats.org/drawingml/2006/main" r:embed="R41db691e7a364d45"/>
-          <a:stretch xmlns:a="http://schemas.openxmlformats.org/drawingml/2006/main"/>
-        </p:blipFill>
-        <p:spPr>
-          <a:xfrm xmlns:a="http://schemas.openxmlformats.org/drawingml/2006/main">
-            <a:off x="8809850" y="4121517"/>
-            <a:ext cx="2568137" cy="2568137"/>
-          </a:xfrm>
-          <a:prstGeom xmlns:a="http://schemas.openxmlformats.org/drawingml/2006/main" prst="rect">
-            <a:avLst/>
-          </a:prstGeom>
-        </p:spPr>
-      </p:pic>
-      <p:pic>
-        <p:nvPicPr>
-          <p:cNvPr id="15" name="Picture 5"/>
-          <p:cNvPicPr>
-            <a:picLocks xmlns:a="http://schemas.openxmlformats.org/drawingml/2006/main" noChangeAspect="1"/>
-          </p:cNvPicPr>
-          <p:nvPr/>
-        </p:nvPicPr>
-        <p:blipFill>
-          <a:blip xmlns:r="http://schemas.openxmlformats.org/officeDocument/2006/relationships" xmlns:a="http://schemas.openxmlformats.org/drawingml/2006/main" r:embed="Rcd180bc185454643"/>
-          <a:stretch xmlns:a="http://schemas.openxmlformats.org/drawingml/2006/main"/>
-        </p:blipFill>
-        <p:spPr>
-          <a:xfrm xmlns:a="http://schemas.openxmlformats.org/drawingml/2006/main">
-            <a:off x="4353525" y="4121517"/>
-            <a:ext cx="3424183" cy="2568137"/>
-          </a:xfrm>
-          <a:prstGeom xmlns:a="http://schemas.openxmlformats.org/drawingml/2006/main" prst="rect">
-            <a:avLst/>
-          </a:prstGeom>
-        </p:spPr>
-      </p:pic>
-      <p:sp>
-        <p:nvSpPr>
-          <p:cNvPr id="7" name="TextBox 6">
+      <p:sp>
+        <p:nvSpPr>
+          <p:cNvPr id="8" name="TextBox 7">
             <a:extLst xmlns:a="http://schemas.openxmlformats.org/drawingml/2006/main">
               <a:ext uri="{FF2B5EF4-FFF2-40B4-BE49-F238E27FC236}">
-                <a16:creationId xmlns:a16="http://schemas.microsoft.com/office/drawing/2014/main" id="{A45B6AC5-C418-CF38-7E40-075352A7766D}"/>
+                <a16:creationId xmlns:a16="http://schemas.microsoft.com/office/drawing/2014/main" id="{8B3926F2-8AD5-7582-6E88-B50737980B3A}"/>
               </a:ext>
             </a:extLst>
           </p:cNvPr>
@@ -4182,8 +3994,8 @@
         </p:nvSpPr>
         <p:spPr>
           <a:xfrm xmlns:a="http://schemas.openxmlformats.org/drawingml/2006/main">
-            <a:off x="308762" y="349509"/>
-            <a:ext cx="4773599" cy="1615440"/>
+            <a:off x="271850" y="328399"/>
+            <a:ext cx="5824150" cy="861774"/>
           </a:xfrm>
           <a:prstGeom xmlns:a="http://schemas.openxmlformats.org/drawingml/2006/main" prst="rect">
             <a:avLst/>
@@ -4220,10 +4032,10 @@
       </p:sp>
       <p:sp>
         <p:nvSpPr>
-          <p:cNvPr id="8" name="TextBox 7">
+          <p:cNvPr id="9" name="TextBox 8">
             <a:extLst xmlns:a="http://schemas.openxmlformats.org/drawingml/2006/main">
               <a:ext uri="{FF2B5EF4-FFF2-40B4-BE49-F238E27FC236}">
-                <a16:creationId xmlns:a16="http://schemas.microsoft.com/office/drawing/2014/main" id="{01BB7B6E-5A70-24FC-9876-AC1845CD1CB6}"/>
+                <a16:creationId xmlns:a16="http://schemas.microsoft.com/office/drawing/2014/main" id="{BAAE8D29-FE4E-8206-3418-E2FEA3E82E78}"/>
               </a:ext>
             </a:extLst>
           </p:cNvPr>
@@ -4234,7 +4046,7 @@
         </p:nvSpPr>
         <p:spPr>
           <a:xfrm xmlns:a="http://schemas.openxmlformats.org/drawingml/2006/main">
-            <a:off x="397740" y="1951672"/>
+            <a:off x="896369" y="2042736"/>
             <a:ext cx="3626350" cy="1737360"/>
           </a:xfrm>
           <a:prstGeom xmlns:a="http://schemas.openxmlformats.org/drawingml/2006/main" prst="rect">
@@ -4254,7 +4066,7 @@
                 <a:ea typeface="Apex New Book"/>
                 <a:cs typeface="Apex New Book"/>
               </a:rPr>
-              <a:t>A semi-fictional portrait of the ideal customer, grounded in research.</a:t>
+              <a:t>A buyer persona combines target-market research into a vivid picture of the ideal customer.</a:t>
             </a:r>
           </a:p>
           <a:p xmlns:a="http://schemas.openxmlformats.org/drawingml/2006/main">
@@ -4268,27 +4080,27 @@
                 <a:ea typeface="Apex New Book"/>
                 <a:cs typeface="Apex New Book"/>
               </a:rPr>
-              <a:t>Include demographics, lifestyle, pain points, objections, media habits, search behavior, and a day in the life.</a:t>
+              <a:t>It includes needs, pain points, objections, habits, and media behavior.</a:t>
             </a:r>
           </a:p>
         </p:txBody>
       </p:sp>
       <p:pic>
         <p:nvPicPr>
-          <p:cNvPr id="18" name=""/>
+          <p:cNvPr id="13" name=""/>
           <p:cNvPicPr>
             <a:picLocks xmlns:a="http://schemas.openxmlformats.org/drawingml/2006/main" noChangeAspect="1"/>
           </p:cNvPicPr>
           <p:nvPr/>
         </p:nvPicPr>
         <p:blipFill>
-          <a:blip xmlns:r="http://schemas.openxmlformats.org/officeDocument/2006/relationships" xmlns:a="http://schemas.openxmlformats.org/drawingml/2006/main" r:embed="Rc8bcd826d7284373"/>
+          <a:blip xmlns:r="http://schemas.openxmlformats.org/officeDocument/2006/relationships" xmlns:a="http://schemas.openxmlformats.org/drawingml/2006/main" r:embed="R7804573861334c0d"/>
           <a:stretch xmlns:a="http://schemas.openxmlformats.org/drawingml/2006/main"/>
         </p:blipFill>
         <p:spPr>
           <a:xfrm xmlns:a="http://schemas.openxmlformats.org/drawingml/2006/main">
-            <a:off x="4762500" y="500063"/>
-            <a:ext cx="7048500" cy="5286375"/>
+            <a:off x="6000750" y="1012031"/>
+            <a:ext cx="5619750" cy="4214813"/>
           </a:xfrm>
           <a:prstGeom xmlns:a="http://schemas.openxmlformats.org/drawingml/2006/main" prst="rect">
             <a:avLst/>
@@ -4298,7 +4110,7 @@
     </p:spTree>
     <p:extLst>
       <p:ext uri="{BB962C8B-B14F-4D97-AF65-F5344CB8AC3E}">
-        <p14:creationId xmlns:p14="http://schemas.microsoft.com/office/powerpoint/2010/main" val="2881694829"/>
+        <p14:creationId xmlns:p14="http://schemas.microsoft.com/office/powerpoint/2010/main" val="1969607770"/>
       </p:ext>
     </p:extLst>
   </p:cSld>
@@ -4317,28 +4129,6 @@
       <p:grpSpPr>
         <a:xfrm xmlns:a="http://schemas.openxmlformats.org/drawingml/2006/main"/>
       </p:grpSpPr>
-      <p:pic>
-        <p:nvPicPr>
-          <p:cNvPr id="8" name="Picture 3"/>
-          <p:cNvPicPr>
-            <a:picLocks xmlns:a="http://schemas.openxmlformats.org/drawingml/2006/main" noChangeAspect="1"/>
-          </p:cNvPicPr>
-          <p:nvPr/>
-        </p:nvPicPr>
-        <p:blipFill rotWithShape="1">
-          <a:blip xmlns:r="http://schemas.openxmlformats.org/officeDocument/2006/relationships" xmlns:a="http://schemas.openxmlformats.org/drawingml/2006/main" r:embed="Rd6ac8e0a37d44140"/>
-          <a:stretch xmlns:a="http://schemas.openxmlformats.org/drawingml/2006/main"/>
-        </p:blipFill>
-        <p:spPr>
-          <a:xfrm xmlns:a="http://schemas.openxmlformats.org/drawingml/2006/main">
-            <a:off x="4833980" y="-1"/>
-            <a:ext cx="5983933" cy="5983933"/>
-          </a:xfrm>
-          <a:prstGeom xmlns:a="http://schemas.openxmlformats.org/drawingml/2006/main" prst="rect">
-            <a:avLst/>
-          </a:prstGeom>
-        </p:spPr>
-      </p:pic>
       <p:sp>
         <p:nvSpPr>
           <p:cNvPr id="6" name="TextBox 5">
@@ -4380,6 +4170,28 @@
           </a:p>
         </p:txBody>
       </p:sp>
+      <p:pic>
+        <p:nvPicPr>
+          <p:cNvPr id="9" name=""/>
+          <p:cNvPicPr>
+            <a:picLocks xmlns:a="http://schemas.openxmlformats.org/drawingml/2006/main" noChangeAspect="1"/>
+          </p:cNvPicPr>
+          <p:nvPr/>
+        </p:nvPicPr>
+        <p:blipFill>
+          <a:blip xmlns:r="http://schemas.openxmlformats.org/officeDocument/2006/relationships" xmlns:a="http://schemas.openxmlformats.org/drawingml/2006/main" r:embed="Rc93a4d5d50284203"/>
+          <a:stretch xmlns:a="http://schemas.openxmlformats.org/drawingml/2006/main"/>
+        </p:blipFill>
+        <p:spPr>
+          <a:xfrm xmlns:a="http://schemas.openxmlformats.org/drawingml/2006/main">
+            <a:off x="4905375" y="1452563"/>
+            <a:ext cx="6667500" cy="3333750"/>
+          </a:xfrm>
+          <a:prstGeom xmlns:a="http://schemas.openxmlformats.org/drawingml/2006/main" prst="rect">
+            <a:avLst/>
+          </a:prstGeom>
+        </p:spPr>
+      </p:pic>
     </p:spTree>
     <p:extLst>
       <p:ext uri="{BB962C8B-B14F-4D97-AF65-F5344CB8AC3E}">
@@ -4391,7 +4203,7 @@
 </file>
 
 <file path=ppt/slides/slide15.xml><?xml version="1.0" encoding="utf-8"?>
-<p:sld xmlns:p="http://schemas.openxmlformats.org/presentationml/2006/main" showMasterSp="0">
+<p:sld xmlns:p="http://schemas.openxmlformats.org/presentationml/2006/main">
   <p:cSld>
     <p:spTree>
       <p:nvGrpSpPr>
@@ -4402,28 +4214,6 @@
       <p:grpSpPr>
         <a:xfrm xmlns:a="http://schemas.openxmlformats.org/drawingml/2006/main"/>
       </p:grpSpPr>
-      <p:pic>
-        <p:nvPicPr>
-          <p:cNvPr id="8" name="Picture 3"/>
-          <p:cNvPicPr>
-            <a:picLocks xmlns:a="http://schemas.openxmlformats.org/drawingml/2006/main" noChangeAspect="1"/>
-          </p:cNvPicPr>
-          <p:nvPr/>
-        </p:nvPicPr>
-        <p:blipFill rotWithShape="1">
-          <a:blip xmlns:r="http://schemas.openxmlformats.org/officeDocument/2006/relationships" xmlns:a="http://schemas.openxmlformats.org/drawingml/2006/main" r:embed="R1b2b28cf794f45ab"/>
-          <a:stretch xmlns:a="http://schemas.openxmlformats.org/drawingml/2006/main"/>
-        </p:blipFill>
-        <p:spPr>
-          <a:xfrm xmlns:a="http://schemas.openxmlformats.org/drawingml/2006/main">
-            <a:off x="3740688" y="-1"/>
-            <a:ext cx="6873056" cy="6873056"/>
-          </a:xfrm>
-          <a:prstGeom xmlns:a="http://schemas.openxmlformats.org/drawingml/2006/main" prst="rect">
-            <a:avLst/>
-          </a:prstGeom>
-        </p:spPr>
-      </p:pic>
       <p:sp>
         <p:nvSpPr>
           <p:cNvPr id="6" name="TextBox 5">
@@ -4440,8 +4230,8 @@
         </p:nvSpPr>
         <p:spPr>
           <a:xfrm xmlns:a="http://schemas.openxmlformats.org/drawingml/2006/main">
-            <a:off x="115330" y="518984"/>
-            <a:ext cx="5980670" cy="861774"/>
+            <a:off x="457200" y="716692"/>
+            <a:ext cx="5980670" cy="1615440"/>
           </a:xfrm>
           <a:prstGeom xmlns:a="http://schemas.openxmlformats.org/drawingml/2006/main" prst="rect">
             <a:avLst/>
@@ -4460,15 +4250,37 @@
                 <a:ea typeface="Century Gothic"/>
                 <a:cs typeface="Century Gothic"/>
               </a:rPr>
-              <a:t>JOURNEY MAP</a:t>
-            </a:r>
-          </a:p>
-        </p:txBody>
-      </p:sp>
+              <a:t>CUSTOMER JOURNEY MAP</a:t>
+            </a:r>
+          </a:p>
+        </p:txBody>
+      </p:sp>
+      <p:pic>
+        <p:nvPicPr>
+          <p:cNvPr id="9" name=""/>
+          <p:cNvPicPr>
+            <a:picLocks xmlns:a="http://schemas.openxmlformats.org/drawingml/2006/main" noChangeAspect="1"/>
+          </p:cNvPicPr>
+          <p:nvPr/>
+        </p:nvPicPr>
+        <p:blipFill>
+          <a:blip xmlns:r="http://schemas.openxmlformats.org/officeDocument/2006/relationships" xmlns:a="http://schemas.openxmlformats.org/drawingml/2006/main" r:embed="Rdb616d44cd444d41"/>
+          <a:stretch xmlns:a="http://schemas.openxmlformats.org/drawingml/2006/main"/>
+        </p:blipFill>
+        <p:spPr>
+          <a:xfrm xmlns:a="http://schemas.openxmlformats.org/drawingml/2006/main">
+            <a:off x="5738813" y="619125"/>
+            <a:ext cx="5000625" cy="5000625"/>
+          </a:xfrm>
+          <a:prstGeom xmlns:a="http://schemas.openxmlformats.org/drawingml/2006/main" prst="rect">
+            <a:avLst/>
+          </a:prstGeom>
+        </p:spPr>
+      </p:pic>
     </p:spTree>
     <p:extLst>
       <p:ext uri="{BB962C8B-B14F-4D97-AF65-F5344CB8AC3E}">
-        <p14:creationId xmlns:p14="http://schemas.microsoft.com/office/powerpoint/2010/main" val="2619640218"/>
+        <p14:creationId xmlns:p14="http://schemas.microsoft.com/office/powerpoint/2010/main" val="1615248900"/>
       </p:ext>
     </p:extLst>
   </p:cSld>
@@ -4532,7 +4344,7 @@
                 <a:ea typeface="Century Gothic"/>
                 <a:cs typeface="Century Gothic"/>
               </a:rPr>
-              <a:t>SECTION 4 — CAMPAIGN GOALS</a:t>
+              <a:t>SECTION 4: CAMPAIGN GOALS</a:t>
             </a:r>
           </a:p>
         </p:txBody>
@@ -4579,7 +4391,7 @@
                 <a:ea typeface="Adobe Garamond Pro Bold"/>
                 <a:cs typeface="Adobe Garamond Pro Bold"/>
               </a:rPr>
-              <a:t>Choose the desired outcome first. Tactics come after the goal is clear.</a:t>
+              <a:t>The desired outcome determines the strategy and tactics.</a:t>
             </a:r>
           </a:p>
         </p:txBody>
@@ -4623,7 +4435,7 @@
         <p:spPr>
           <a:xfrm xmlns:a="http://schemas.openxmlformats.org/drawingml/2006/main">
             <a:off x="506626" y="430118"/>
-            <a:ext cx="10625199" cy="861774"/>
+            <a:ext cx="10625199" cy="1615440"/>
           </a:xfrm>
           <a:prstGeom xmlns:a="http://schemas.openxmlformats.org/drawingml/2006/main" prst="rect">
             <a:avLst/>
@@ -4645,98 +4457,8 @@
                 <a:ea typeface="Century Gothic"/>
                 <a:cs typeface="Century Gothic"/>
               </a:rPr>
-              <a:t>AWARENESS</a:t>
-            </a:r>
-          </a:p>
-        </p:txBody>
-      </p:sp>
-      <p:sp>
-        <p:nvSpPr>
-          <p:cNvPr id="6" name="TextBox 5">
-            <a:extLst xmlns:a="http://schemas.openxmlformats.org/drawingml/2006/main">
-              <a:ext uri="{FF2B5EF4-FFF2-40B4-BE49-F238E27FC236}">
-                <a16:creationId xmlns:a16="http://schemas.microsoft.com/office/drawing/2014/main" id="{2F224D25-900A-CB0D-31E1-F5F0798768B3}"/>
-              </a:ext>
-            </a:extLst>
-          </p:cNvPr>
-          <p:cNvSpPr>
-            <a:spLocks xmlns:a="http://schemas.openxmlformats.org/drawingml/2006/main" noGrp="1"/>
-          </p:cNvSpPr>
-          <p:nvPr/>
-        </p:nvSpPr>
-        <p:spPr>
-          <a:xfrm xmlns:a="http://schemas.openxmlformats.org/drawingml/2006/main">
-            <a:off x="506623" y="1260709"/>
-            <a:ext cx="10823981" cy="861774"/>
-          </a:xfrm>
-          <a:prstGeom xmlns:a="http://schemas.openxmlformats.org/drawingml/2006/main" prst="rect">
-            <a:avLst/>
-          </a:prstGeom>
-          <a:noFill xmlns:a="http://schemas.openxmlformats.org/drawingml/2006/main"/>
-        </p:spPr>
-        <p:txBody>
-          <a:bodyPr xmlns:a="http://schemas.openxmlformats.org/drawingml/2006/main" wrap="square">
-            <a:spAutoFit/>
-          </a:bodyPr>
-          <a:lstStyle xmlns:a="http://schemas.openxmlformats.org/drawingml/2006/main"/>
-          <a:p xmlns:a="http://schemas.openxmlformats.org/drawingml/2006/main">
-            <a:r>
-              <a:rPr sz="5000" b="1" spc="-150">
-                <a:solidFill>
-                  <a:srgbClr val="00637C"/>
-                </a:solidFill>
-                <a:latin typeface="Century Gothic"/>
-                <a:ea typeface="Century Gothic"/>
-                <a:cs typeface="Century Gothic"/>
-              </a:rPr>
-              <a:t>ACTION</a:t>
-            </a:r>
-          </a:p>
-        </p:txBody>
-      </p:sp>
-      <p:sp>
-        <p:nvSpPr>
-          <p:cNvPr id="7" name="TextBox 6">
-            <a:extLst xmlns:a="http://schemas.openxmlformats.org/drawingml/2006/main">
-              <a:ext uri="{FF2B5EF4-FFF2-40B4-BE49-F238E27FC236}">
-                <a16:creationId xmlns:a16="http://schemas.microsoft.com/office/drawing/2014/main" id="{787FD0A2-94F3-0018-D150-0CD40EE2A0A3}"/>
-              </a:ext>
-            </a:extLst>
-          </p:cNvPr>
-          <p:cNvSpPr>
-            <a:spLocks xmlns:a="http://schemas.openxmlformats.org/drawingml/2006/main" noGrp="1"/>
-          </p:cNvSpPr>
-          <p:nvPr/>
-        </p:nvSpPr>
-        <p:spPr>
-          <a:xfrm xmlns:a="http://schemas.openxmlformats.org/drawingml/2006/main">
-            <a:off x="506622" y="2073418"/>
-            <a:ext cx="10823982" cy="861774"/>
-          </a:xfrm>
-          <a:prstGeom xmlns:a="http://schemas.openxmlformats.org/drawingml/2006/main" prst="rect">
-            <a:avLst/>
-          </a:prstGeom>
-          <a:noFill xmlns:a="http://schemas.openxmlformats.org/drawingml/2006/main"/>
-        </p:spPr>
-        <p:txBody>
-          <a:bodyPr xmlns:a="http://schemas.openxmlformats.org/drawingml/2006/main" wrap="square">
-            <a:spAutoFit/>
-          </a:bodyPr>
-          <a:lstStyle xmlns:a="http://schemas.openxmlformats.org/drawingml/2006/main"/>
-          <a:p xmlns:a="http://schemas.openxmlformats.org/drawingml/2006/main">
-            <a:r>
-              <a:rPr sz="5000" b="1" spc="-150">
-                <a:latin typeface="Century Gothic"/>
-                <a:ea typeface="Century Gothic"/>
-                <a:cs typeface="Century Gothic"/>
-              </a:rPr>
-              <a:t>RELATIONSHIP</a:t>
-            </a:r>
-            <a:endParaRPr sz="5000" b="1" spc="-150">
-              <a:latin typeface="Century Gothic"/>
-              <a:ea typeface="Century Gothic"/>
-              <a:cs typeface="Century Gothic"/>
-            </a:endParaRPr>
+              <a:t>DIGITAL MARKETING CAMPAIGN GOALS</a:t>
+            </a:r>
           </a:p>
         </p:txBody>
       </p:sp>
@@ -4776,7 +4498,7 @@
                 <a:ea typeface="Apex New Light"/>
                 <a:cs typeface="Apex New Light"/>
               </a:rPr>
-              <a:t>Campaign goals describe outcomes—not channels.</a:t>
+              <a:t>Common goals include awareness, recall, sales, traffic, positioning, credibility, leads, relationships, and communicating value.</a:t>
             </a:r>
           </a:p>
           <a:p xmlns:a="http://schemas.openxmlformats.org/drawingml/2006/main">
@@ -4790,49 +4512,7 @@
                 <a:ea typeface="Apex New Light"/>
                 <a:cs typeface="Apex New Light"/>
               </a:rPr>
-              <a:t>Awareness and recall</a:t>
-            </a:r>
-          </a:p>
-          <a:p xmlns:a="http://schemas.openxmlformats.org/drawingml/2006/main">
-            <a:pPr marL="342900" indent="-342900">
-              <a:buFont typeface="Arial"/>
-              <a:buChar char="•"/>
-            </a:pPr>
-            <a:r>
-              <a:rPr sz="2400">
-                <a:latin typeface="Apex New Light"/>
-                <a:ea typeface="Apex New Light"/>
-                <a:cs typeface="Apex New Light"/>
-              </a:rPr>
-              <a:t>Sales, traffic, and leads</a:t>
-            </a:r>
-          </a:p>
-          <a:p xmlns:a="http://schemas.openxmlformats.org/drawingml/2006/main">
-            <a:pPr marL="342900" indent="-342900">
-              <a:buFont typeface="Arial"/>
-              <a:buChar char="•"/>
-            </a:pPr>
-            <a:r>
-              <a:rPr sz="2400">
-                <a:latin typeface="Apex New Light"/>
-                <a:ea typeface="Apex New Light"/>
-                <a:cs typeface="Apex New Light"/>
-              </a:rPr>
-              <a:t>Positioning and credibility</a:t>
-            </a:r>
-          </a:p>
-          <a:p xmlns:a="http://schemas.openxmlformats.org/drawingml/2006/main">
-            <a:pPr marL="342900" indent="-342900">
-              <a:buFont typeface="Arial"/>
-              <a:buChar char="•"/>
-            </a:pPr>
-            <a:r>
-              <a:rPr sz="2400">
-                <a:latin typeface="Apex New Light"/>
-                <a:ea typeface="Apex New Light"/>
-                <a:cs typeface="Apex New Light"/>
-              </a:rPr>
-              <a:t>Relationships and value</a:t>
+              <a:t>The right goal depends on the organization, audience, market, and product life-cycle stage.</a:t>
             </a:r>
           </a:p>
         </p:txBody>
@@ -4945,7 +4625,7 @@
                 <a:ea typeface="Adobe Garamond Pro Bold"/>
                 <a:cs typeface="Adobe Garamond Pro Bold"/>
               </a:rPr>
-              <a:t>Brand clarity + customer insight + the right goal create a strategy that can guide every channel and tactic.</a:t>
+              <a:t>Brand clarity, customer insight, and the right campaign goal guide every channel and tactic.</a:t>
             </a:r>
             <a:endParaRPr sz="2800" b="1" i="1">
               <a:solidFill>
@@ -5019,98 +4699,8 @@
                 <a:ea typeface="Century Gothic"/>
                 <a:cs typeface="Century Gothic"/>
               </a:rPr>
-              <a:t>WHY FOUNDATIONS MATTER</a:t>
-            </a:r>
-          </a:p>
-        </p:txBody>
-      </p:sp>
-      <p:sp>
-        <p:nvSpPr>
-          <p:cNvPr id="6" name="TextBox 5">
-            <a:extLst xmlns:a="http://schemas.openxmlformats.org/drawingml/2006/main">
-              <a:ext uri="{FF2B5EF4-FFF2-40B4-BE49-F238E27FC236}">
-                <a16:creationId xmlns:a16="http://schemas.microsoft.com/office/drawing/2014/main" id="{2F224D25-900A-CB0D-31E1-F5F0798768B3}"/>
-              </a:ext>
-            </a:extLst>
-          </p:cNvPr>
-          <p:cNvSpPr>
-            <a:spLocks xmlns:a="http://schemas.openxmlformats.org/drawingml/2006/main" noGrp="1"/>
-          </p:cNvSpPr>
-          <p:nvPr/>
-        </p:nvSpPr>
-        <p:spPr>
-          <a:xfrm xmlns:a="http://schemas.openxmlformats.org/drawingml/2006/main">
-            <a:off x="506623" y="1260709"/>
-            <a:ext cx="10823981" cy="861774"/>
-          </a:xfrm>
-          <a:prstGeom xmlns:a="http://schemas.openxmlformats.org/drawingml/2006/main" prst="rect">
-            <a:avLst/>
-          </a:prstGeom>
-          <a:noFill xmlns:a="http://schemas.openxmlformats.org/drawingml/2006/main"/>
-        </p:spPr>
-        <p:txBody>
-          <a:bodyPr xmlns:a="http://schemas.openxmlformats.org/drawingml/2006/main" wrap="square">
-            <a:spAutoFit/>
-          </a:bodyPr>
-          <a:lstStyle xmlns:a="http://schemas.openxmlformats.org/drawingml/2006/main"/>
-          <a:p xmlns:a="http://schemas.openxmlformats.org/drawingml/2006/main">
-            <a:r>
-              <a:rPr sz="5000" b="1" spc="-150">
-                <a:solidFill>
-                  <a:srgbClr val="00637C"/>
-                </a:solidFill>
-                <a:latin typeface="Century Gothic"/>
-                <a:ea typeface="Century Gothic"/>
-                <a:cs typeface="Century Gothic"/>
-              </a:rPr>
-              <a:t>CLARITY BEFORE TACTICS</a:t>
-            </a:r>
-          </a:p>
-        </p:txBody>
-      </p:sp>
-      <p:sp>
-        <p:nvSpPr>
-          <p:cNvPr id="7" name="TextBox 6">
-            <a:extLst xmlns:a="http://schemas.openxmlformats.org/drawingml/2006/main">
-              <a:ext uri="{FF2B5EF4-FFF2-40B4-BE49-F238E27FC236}">
-                <a16:creationId xmlns:a16="http://schemas.microsoft.com/office/drawing/2014/main" id="{787FD0A2-94F3-0018-D150-0CD40EE2A0A3}"/>
-              </a:ext>
-            </a:extLst>
-          </p:cNvPr>
-          <p:cNvSpPr>
-            <a:spLocks xmlns:a="http://schemas.openxmlformats.org/drawingml/2006/main" noGrp="1"/>
-          </p:cNvSpPr>
-          <p:nvPr/>
-        </p:nvSpPr>
-        <p:spPr>
-          <a:xfrm xmlns:a="http://schemas.openxmlformats.org/drawingml/2006/main">
-            <a:off x="506622" y="2073418"/>
-            <a:ext cx="10823982" cy="861774"/>
-          </a:xfrm>
-          <a:prstGeom xmlns:a="http://schemas.openxmlformats.org/drawingml/2006/main" prst="rect">
-            <a:avLst/>
-          </a:prstGeom>
-          <a:noFill xmlns:a="http://schemas.openxmlformats.org/drawingml/2006/main"/>
-        </p:spPr>
-        <p:txBody>
-          <a:bodyPr xmlns:a="http://schemas.openxmlformats.org/drawingml/2006/main" wrap="square">
-            <a:spAutoFit/>
-          </a:bodyPr>
-          <a:lstStyle xmlns:a="http://schemas.openxmlformats.org/drawingml/2006/main"/>
-          <a:p xmlns:a="http://schemas.openxmlformats.org/drawingml/2006/main">
-            <a:r>
-              <a:rPr sz="5000" b="1" spc="-150">
-                <a:latin typeface="Century Gothic"/>
-                <a:ea typeface="Century Gothic"/>
-                <a:cs typeface="Century Gothic"/>
-              </a:rPr>
-              <a:t>WEEK 2 OUTCOMES</a:t>
-            </a:r>
-            <a:endParaRPr sz="5000" b="1" spc="-150">
-              <a:latin typeface="Century Gothic"/>
-              <a:ea typeface="Century Gothic"/>
-              <a:cs typeface="Century Gothic"/>
-            </a:endParaRPr>
+              <a:t>WEEK 2 OVERVIEW</a:t>
+            </a:r>
           </a:p>
         </p:txBody>
       </p:sp>
@@ -5131,7 +4721,7 @@
         <p:spPr>
           <a:xfrm xmlns:a="http://schemas.openxmlformats.org/drawingml/2006/main">
             <a:off x="1360238" y="3611687"/>
-            <a:ext cx="6722075" cy="2286000"/>
+            <a:ext cx="6722075" cy="1200329"/>
           </a:xfrm>
           <a:prstGeom xmlns:a="http://schemas.openxmlformats.org/drawingml/2006/main" prst="rect">
             <a:avLst/>
@@ -5150,7 +4740,7 @@
                 <a:ea typeface="Apex New Light"/>
                 <a:cs typeface="Apex New Light"/>
               </a:rPr>
-              <a:t>Build the brand, customer, journey, and goal foundations for a stronger digital marketing strategy.</a:t>
+              <a:t>The foundation comes before the tactics.</a:t>
             </a:r>
           </a:p>
           <a:p xmlns:a="http://schemas.openxmlformats.org/drawingml/2006/main">
@@ -5164,35 +4754,7 @@
                 <a:ea typeface="Apex New Light"/>
                 <a:cs typeface="Apex New Light"/>
               </a:rPr>
-              <a:t>Identify what must be defined before strategy begins</a:t>
-            </a:r>
-          </a:p>
-          <a:p xmlns:a="http://schemas.openxmlformats.org/drawingml/2006/main">
-            <a:pPr marL="342900" indent="-342900">
-              <a:buFont typeface="Arial"/>
-              <a:buChar char="•"/>
-            </a:pPr>
-            <a:r>
-              <a:rPr sz="2400">
-                <a:latin typeface="Apex New Light"/>
-                <a:ea typeface="Apex New Light"/>
-                <a:cs typeface="Apex New Light"/>
-              </a:rPr>
-              <a:t>Connect customer insight to channel choices</a:t>
-            </a:r>
-          </a:p>
-          <a:p xmlns:a="http://schemas.openxmlformats.org/drawingml/2006/main">
-            <a:pPr marL="342900" indent="-342900">
-              <a:buFont typeface="Arial"/>
-              <a:buChar char="•"/>
-            </a:pPr>
-            <a:r>
-              <a:rPr sz="2400">
-                <a:latin typeface="Apex New Light"/>
-                <a:ea typeface="Apex New Light"/>
-                <a:cs typeface="Apex New Light"/>
-              </a:rPr>
-              <a:t>Select goals that fit the organization and market</a:t>
+              <a:t>This week connects brand decisions with customer research and campaign goals.</a:t>
             </a:r>
           </a:p>
         </p:txBody>
@@ -5208,7 +4770,7 @@
 </file>
 
 <file path=ppt/slides/slide3.xml><?xml version="1.0" encoding="utf-8"?>
-<p:sld xmlns:p="http://schemas.openxmlformats.org/presentationml/2006/main" showMasterSp="0">
+<p:sld xmlns:p="http://schemas.openxmlformats.org/presentationml/2006/main">
   <p:cSld>
     <p:spTree>
       <p:nvGrpSpPr>
@@ -5221,202 +4783,54 @@
       </p:grpSpPr>
       <p:sp>
         <p:nvSpPr>
-          <p:cNvPr id="2" name="Title 1">
+          <p:cNvPr id="4" name="TextBox 3">
             <a:extLst xmlns:a="http://schemas.openxmlformats.org/drawingml/2006/main">
               <a:ext uri="{FF2B5EF4-FFF2-40B4-BE49-F238E27FC236}">
-                <a16:creationId xmlns:a16="http://schemas.microsoft.com/office/drawing/2014/main" id="{A40A632F-27A2-8065-0D16-81BA8DEF66F2}"/>
+                <a16:creationId xmlns:a16="http://schemas.microsoft.com/office/drawing/2014/main" id="{CC6A4120-A6E9-C201-2822-99E980DEAA23}"/>
               </a:ext>
             </a:extLst>
           </p:cNvPr>
           <p:cNvSpPr>
             <a:spLocks xmlns:a="http://schemas.openxmlformats.org/drawingml/2006/main" noGrp="1"/>
           </p:cNvSpPr>
-          <p:nvPr>
-            <p:ph type="title" idx="0"/>
-          </p:nvPr>
+          <p:nvPr/>
         </p:nvSpPr>
         <p:spPr>
           <a:xfrm xmlns:a="http://schemas.openxmlformats.org/drawingml/2006/main">
-            <a:off x="438698" y="336332"/>
-            <a:ext cx="10512424" cy="670034"/>
+            <a:off x="506626" y="430118"/>
+            <a:ext cx="10625199" cy="861774"/>
           </a:xfrm>
-        </p:spPr>
-        <p:txBody>
-          <a:bodyPr xmlns:a="http://schemas.openxmlformats.org/drawingml/2006/main">
-            <a:noAutofit/>
+          <a:prstGeom xmlns:a="http://schemas.openxmlformats.org/drawingml/2006/main" prst="rect">
+            <a:avLst/>
+          </a:prstGeom>
+          <a:noFill xmlns:a="http://schemas.openxmlformats.org/drawingml/2006/main"/>
+        </p:spPr>
+        <p:txBody>
+          <a:bodyPr xmlns:a="http://schemas.openxmlformats.org/drawingml/2006/main" wrap="square">
+            <a:spAutoFit/>
           </a:bodyPr>
           <a:lstStyle xmlns:a="http://schemas.openxmlformats.org/drawingml/2006/main"/>
           <a:p xmlns:a="http://schemas.openxmlformats.org/drawingml/2006/main">
             <a:r>
-              <a:rPr sz="5000"/>
-              <a:t>WEEK 2 ROADMAP</a:t>
-            </a:r>
-          </a:p>
-        </p:txBody>
-      </p:sp>
-      <p:sp>
-        <p:nvSpPr>
-          <p:cNvPr id="4" name="Text Placeholder 3">
-            <a:extLst xmlns:a="http://schemas.openxmlformats.org/drawingml/2006/main">
-              <a:ext uri="{FF2B5EF4-FFF2-40B4-BE49-F238E27FC236}">
-                <a16:creationId xmlns:a16="http://schemas.microsoft.com/office/drawing/2014/main" id="{20A1E884-6BCE-A56C-45AD-DAC9425A36DF}"/>
-              </a:ext>
-            </a:extLst>
-          </p:cNvPr>
-          <p:cNvSpPr>
-            <a:spLocks xmlns:a="http://schemas.openxmlformats.org/drawingml/2006/main" noGrp="1"/>
-          </p:cNvSpPr>
-          <p:nvPr>
-            <p:ph type="body" idx="2"/>
-          </p:nvPr>
-        </p:nvSpPr>
-        <p:spPr>
-          <a:xfrm xmlns:a="http://schemas.openxmlformats.org/drawingml/2006/main">
-            <a:off x="839788" y="1810407"/>
-            <a:ext cx="4982944" cy="4058581"/>
-          </a:xfrm>
-        </p:spPr>
-        <p:txBody>
-          <a:bodyPr xmlns:a="http://schemas.openxmlformats.org/drawingml/2006/main"/>
-          <a:lstStyle xmlns:a="http://schemas.openxmlformats.org/drawingml/2006/main"/>
-          <a:p xmlns:a="http://schemas.openxmlformats.org/drawingml/2006/main">
-            <a:r>
-              <a:rPr b="1">
+              <a:rPr sz="5000" b="1" spc="-150">
                 <a:solidFill>
-                  <a:srgbClr val="DDAF4C"/>
+                  <a:schemeClr val="accent2"/>
                 </a:solidFill>
                 <a:latin typeface="Century Gothic"/>
                 <a:ea typeface="Century Gothic"/>
                 <a:cs typeface="Century Gothic"/>
               </a:rPr>
-              <a:t>1. THE FOUNDATION</a:t>
-            </a:r>
-          </a:p>
-          <a:p xmlns:a="http://schemas.openxmlformats.org/drawingml/2006/main">
-            <a:pPr>
-              <a:lnSpc>
-                <a:spcPct val="100000"/>
-              </a:lnSpc>
-              <a:spcBef>
-                <a:spcPts val="400"/>
-              </a:spcBef>
-              <a:buNone/>
-            </a:pPr>
-            <a:r>
-              <a:rPr b="1">
-                <a:latin typeface="Century Gothic"/>
-                <a:ea typeface="Century Gothic"/>
-                <a:cs typeface="Century Gothic"/>
-              </a:rPr>
-              <a:t>Brand, customer, and goals</a:t>
-            </a:r>
-          </a:p>
-          <a:p xmlns:a="http://schemas.openxmlformats.org/drawingml/2006/main">
-            <a:r>
-              <a:t/>
-            </a:r>
-            <a:endParaRPr b="1">
-              <a:latin typeface="Century Gothic"/>
-              <a:ea typeface="Century Gothic"/>
-              <a:cs typeface="Century Gothic"/>
-            </a:endParaRPr>
-          </a:p>
-          <a:p xmlns:a="http://schemas.openxmlformats.org/drawingml/2006/main">
-            <a:r>
-              <a:rPr>
-                <a:solidFill>
-                  <a:srgbClr val="DDAF4C"/>
-                </a:solidFill>
-              </a:rPr>
-              <a:t>2. THE BRAND</a:t>
-            </a:r>
-          </a:p>
-          <a:p xmlns:a="http://schemas.openxmlformats.org/drawingml/2006/main">
-            <a:r>
-              <a:t>Mission, positioning, identity, and image</a:t>
-            </a:r>
-            <a:endParaRPr/>
-          </a:p>
-          <a:p xmlns:a="http://schemas.openxmlformats.org/drawingml/2006/main">
-            <a:r>
-              <a:rPr>
-                <a:solidFill>
-                  <a:srgbClr val="DDAF4C"/>
-                </a:solidFill>
-              </a:rPr>
-              <a:t/>
-            </a:r>
-          </a:p>
-          <a:p xmlns:a="http://schemas.openxmlformats.org/drawingml/2006/main">
-            <a:pPr marL="285750" indent="-285750">
-              <a:buFont typeface="Arial"/>
-              <a:buChar char="•"/>
-            </a:pPr>
-            <a:r>
-              <a:t>3. THE CUSTOMER</a:t>
-            </a:r>
-            <a:endParaRPr/>
-          </a:p>
-          <a:p xmlns:a="http://schemas.openxmlformats.org/drawingml/2006/main">
-            <a:r>
-              <a:rPr b="1" i="1">
-                <a:solidFill>
-                  <a:srgbClr val="DDAF4C"/>
-                </a:solidFill>
-                <a:latin typeface="Adobe Garamond Pro Bold"/>
-                <a:ea typeface="Adobe Garamond Pro Bold"/>
-                <a:cs typeface="Adobe Garamond Pro Bold"/>
-              </a:rPr>
-              <a:t>Buyer persona, journey, and touchpoints</a:t>
-            </a:r>
-          </a:p>
-          <a:p xmlns:a="http://schemas.openxmlformats.org/drawingml/2006/main">
-            <a:r>
-              <a:rPr b="1" i="1">
-                <a:solidFill>
-                  <a:srgbClr val="DDAF4C"/>
-                </a:solidFill>
-                <a:latin typeface="Adobe Garamond Pro Bold"/>
-                <a:ea typeface="Adobe Garamond Pro Bold"/>
-                <a:cs typeface="Adobe Garamond Pro Bold"/>
-              </a:rPr>
-              <a:t/>
-            </a:r>
-          </a:p>
-          <a:p xmlns:a="http://schemas.openxmlformats.org/drawingml/2006/main">
-            <a:r>
-              <a:rPr b="1" i="1">
-                <a:solidFill>
-                  <a:srgbClr val="DDAF4C"/>
-                </a:solidFill>
-                <a:latin typeface="Adobe Garamond Pro Bold"/>
-                <a:ea typeface="Adobe Garamond Pro Bold"/>
-                <a:cs typeface="Adobe Garamond Pro Bold"/>
-              </a:rPr>
-              <a:t>4. CAMPAIGN GOALS</a:t>
-            </a:r>
-          </a:p>
-          <a:p xmlns:a="http://schemas.openxmlformats.org/drawingml/2006/main">
-            <a:r>
-              <a:rPr b="1" i="1">
-                <a:solidFill>
-                  <a:srgbClr val="DDAF4C"/>
-                </a:solidFill>
-                <a:latin typeface="Adobe Garamond Pro Bold"/>
-                <a:ea typeface="Adobe Garamond Pro Bold"/>
-                <a:cs typeface="Adobe Garamond Pro Bold"/>
-              </a:rPr>
-              <a:t>Choose the right outcome before the tactics</a:t>
-            </a:r>
-          </a:p>
-        </p:txBody>
-      </p:sp>
-      <p:sp>
-        <p:nvSpPr>
-          <p:cNvPr id="5" name="Rounded Rectangle 4">
+              <a:t>WEEK 2 ROADMAP</a:t>
+            </a:r>
+          </a:p>
+        </p:txBody>
+      </p:sp>
+      <p:sp>
+        <p:nvSpPr>
+          <p:cNvPr id="8" name="TextBox 7">
             <a:extLst xmlns:a="http://schemas.openxmlformats.org/drawingml/2006/main">
               <a:ext uri="{FF2B5EF4-FFF2-40B4-BE49-F238E27FC236}">
-                <a16:creationId xmlns:a16="http://schemas.microsoft.com/office/drawing/2014/main" id="{12F0FEC4-7EAD-B68C-8E13-BF8102AD9EDB}"/>
+                <a16:creationId xmlns:a16="http://schemas.microsoft.com/office/drawing/2014/main" id="{158774D9-74C1-3786-BA30-6C2B11D8E6B7}"/>
               </a:ext>
             </a:extLst>
           </p:cNvPr>
@@ -5427,340 +4841,8 @@
         </p:nvSpPr>
         <p:spPr>
           <a:xfrm xmlns:a="http://schemas.openxmlformats.org/drawingml/2006/main">
-            <a:off x="6369269" y="2658600"/>
-            <a:ext cx="1387365" cy="1250730"/>
-          </a:xfrm>
-          <a:prstGeom xmlns:a="http://schemas.openxmlformats.org/drawingml/2006/main" prst="roundRect">
-            <a:avLst/>
-          </a:prstGeom>
-        </p:spPr>
-        <p:style>
-          <a:lnRef xmlns:a="http://schemas.openxmlformats.org/drawingml/2006/main" idx="2">
-            <a:schemeClr val="accent1">
-              <a:shade val="50000"/>
-            </a:schemeClr>
-          </a:lnRef>
-          <a:fillRef xmlns:a="http://schemas.openxmlformats.org/drawingml/2006/main" idx="1">
-            <a:schemeClr val="accent1"/>
-          </a:fillRef>
-          <a:effectRef xmlns:a="http://schemas.openxmlformats.org/drawingml/2006/main" idx="0">
-            <a:schemeClr val="accent1"/>
-          </a:effectRef>
-          <a:fontRef xmlns:a="http://schemas.openxmlformats.org/drawingml/2006/main" idx="minor">
-            <a:schemeClr val="lt1"/>
-          </a:fontRef>
-        </p:style>
-        <p:txBody>
-          <a:bodyPr xmlns:a="http://schemas.openxmlformats.org/drawingml/2006/main" anchor="ctr"/>
-          <a:lstStyle xmlns:a="http://schemas.openxmlformats.org/drawingml/2006/main"/>
-          <a:p xmlns:a="http://schemas.openxmlformats.org/drawingml/2006/main">
-            <a:pPr algn="ctr">
-              <a:buNone/>
-            </a:pPr>
-            <a:endParaRPr/>
-          </a:p>
-        </p:txBody>
-      </p:sp>
-      <p:sp>
-        <p:nvSpPr>
-          <p:cNvPr id="6" name="Rounded Rectangle 5">
-            <a:extLst xmlns:a="http://schemas.openxmlformats.org/drawingml/2006/main">
-              <a:ext uri="{FF2B5EF4-FFF2-40B4-BE49-F238E27FC236}">
-                <a16:creationId xmlns:a16="http://schemas.microsoft.com/office/drawing/2014/main" id="{1A88B1BB-3179-908F-C0B3-FC09BD506FA3}"/>
-              </a:ext>
-            </a:extLst>
-          </p:cNvPr>
-          <p:cNvSpPr>
-            <a:spLocks xmlns:a="http://schemas.openxmlformats.org/drawingml/2006/main" noGrp="1"/>
-          </p:cNvSpPr>
-          <p:nvPr/>
-        </p:nvSpPr>
-        <p:spPr>
-          <a:xfrm xmlns:a="http://schemas.openxmlformats.org/drawingml/2006/main">
-            <a:off x="7966513" y="2658600"/>
-            <a:ext cx="1387365" cy="1250730"/>
-          </a:xfrm>
-          <a:prstGeom xmlns:a="http://schemas.openxmlformats.org/drawingml/2006/main" prst="roundRect">
-            <a:avLst/>
-          </a:prstGeom>
-          <a:solidFill xmlns:a="http://schemas.openxmlformats.org/drawingml/2006/main">
-            <a:schemeClr val="accent2"/>
-          </a:solidFill>
-          <a:ln xmlns:a="http://schemas.openxmlformats.org/drawingml/2006/main">
-            <a:noFill/>
-          </a:ln>
-        </p:spPr>
-        <p:style>
-          <a:lnRef xmlns:a="http://schemas.openxmlformats.org/drawingml/2006/main" idx="2">
-            <a:schemeClr val="accent1">
-              <a:shade val="50000"/>
-            </a:schemeClr>
-          </a:lnRef>
-          <a:fillRef xmlns:a="http://schemas.openxmlformats.org/drawingml/2006/main" idx="1">
-            <a:schemeClr val="accent1"/>
-          </a:fillRef>
-          <a:effectRef xmlns:a="http://schemas.openxmlformats.org/drawingml/2006/main" idx="0">
-            <a:schemeClr val="accent1"/>
-          </a:effectRef>
-          <a:fontRef xmlns:a="http://schemas.openxmlformats.org/drawingml/2006/main" idx="minor">
-            <a:schemeClr val="lt1"/>
-          </a:fontRef>
-        </p:style>
-        <p:txBody>
-          <a:bodyPr xmlns:a="http://schemas.openxmlformats.org/drawingml/2006/main" anchor="ctr"/>
-          <a:lstStyle xmlns:a="http://schemas.openxmlformats.org/drawingml/2006/main"/>
-          <a:p xmlns:a="http://schemas.openxmlformats.org/drawingml/2006/main">
-            <a:pPr algn="ctr">
-              <a:buNone/>
-            </a:pPr>
-            <a:endParaRPr/>
-          </a:p>
-        </p:txBody>
-      </p:sp>
-      <p:sp>
-        <p:nvSpPr>
-          <p:cNvPr id="7" name="Rounded Rectangle 6">
-            <a:extLst xmlns:a="http://schemas.openxmlformats.org/drawingml/2006/main">
-              <a:ext uri="{FF2B5EF4-FFF2-40B4-BE49-F238E27FC236}">
-                <a16:creationId xmlns:a16="http://schemas.microsoft.com/office/drawing/2014/main" id="{51CC911B-2143-626D-73B5-72C472EBF4C6}"/>
-              </a:ext>
-            </a:extLst>
-          </p:cNvPr>
-          <p:cNvSpPr>
-            <a:spLocks xmlns:a="http://schemas.openxmlformats.org/drawingml/2006/main" noGrp="1"/>
-          </p:cNvSpPr>
-          <p:nvPr/>
-        </p:nvSpPr>
-        <p:spPr>
-          <a:xfrm xmlns:a="http://schemas.openxmlformats.org/drawingml/2006/main">
-            <a:off x="9563757" y="2658600"/>
-            <a:ext cx="1387365" cy="1250730"/>
-          </a:xfrm>
-          <a:prstGeom xmlns:a="http://schemas.openxmlformats.org/drawingml/2006/main" prst="roundRect">
-            <a:avLst/>
-          </a:prstGeom>
-          <a:solidFill xmlns:a="http://schemas.openxmlformats.org/drawingml/2006/main">
-            <a:schemeClr val="tx2"/>
-          </a:solidFill>
-          <a:ln xmlns:a="http://schemas.openxmlformats.org/drawingml/2006/main">
-            <a:noFill/>
-          </a:ln>
-        </p:spPr>
-        <p:style>
-          <a:lnRef xmlns:a="http://schemas.openxmlformats.org/drawingml/2006/main" idx="2">
-            <a:schemeClr val="accent1">
-              <a:shade val="50000"/>
-            </a:schemeClr>
-          </a:lnRef>
-          <a:fillRef xmlns:a="http://schemas.openxmlformats.org/drawingml/2006/main" idx="1">
-            <a:schemeClr val="accent1"/>
-          </a:fillRef>
-          <a:effectRef xmlns:a="http://schemas.openxmlformats.org/drawingml/2006/main" idx="0">
-            <a:schemeClr val="accent1"/>
-          </a:effectRef>
-          <a:fontRef xmlns:a="http://schemas.openxmlformats.org/drawingml/2006/main" idx="minor">
-            <a:schemeClr val="lt1"/>
-          </a:fontRef>
-        </p:style>
-        <p:txBody>
-          <a:bodyPr xmlns:a="http://schemas.openxmlformats.org/drawingml/2006/main" anchor="ctr"/>
-          <a:lstStyle xmlns:a="http://schemas.openxmlformats.org/drawingml/2006/main"/>
-          <a:p xmlns:a="http://schemas.openxmlformats.org/drawingml/2006/main">
-            <a:pPr algn="ctr">
-              <a:buNone/>
-            </a:pPr>
-            <a:endParaRPr/>
-          </a:p>
-        </p:txBody>
-      </p:sp>
-      <p:sp>
-        <p:nvSpPr>
-          <p:cNvPr id="8" name="Rounded Rectangle 7">
-            <a:extLst xmlns:a="http://schemas.openxmlformats.org/drawingml/2006/main">
-              <a:ext uri="{FF2B5EF4-FFF2-40B4-BE49-F238E27FC236}">
-                <a16:creationId xmlns:a16="http://schemas.microsoft.com/office/drawing/2014/main" id="{F19ECE26-9A7B-B918-0205-680F20BF9845}"/>
-              </a:ext>
-            </a:extLst>
-          </p:cNvPr>
-          <p:cNvSpPr>
-            <a:spLocks xmlns:a="http://schemas.openxmlformats.org/drawingml/2006/main" noGrp="1"/>
-          </p:cNvSpPr>
-          <p:nvPr/>
-        </p:nvSpPr>
-        <p:spPr>
-          <a:xfrm xmlns:a="http://schemas.openxmlformats.org/drawingml/2006/main">
-            <a:off x="6369269" y="4163170"/>
-            <a:ext cx="1387365" cy="1250730"/>
-          </a:xfrm>
-          <a:prstGeom xmlns:a="http://schemas.openxmlformats.org/drawingml/2006/main" prst="roundRect">
-            <a:avLst/>
-          </a:prstGeom>
-          <a:solidFill xmlns:a="http://schemas.openxmlformats.org/drawingml/2006/main">
-            <a:schemeClr val="bg2"/>
-          </a:solidFill>
-          <a:ln xmlns:a="http://schemas.openxmlformats.org/drawingml/2006/main">
-            <a:noFill/>
-          </a:ln>
-        </p:spPr>
-        <p:style>
-          <a:lnRef xmlns:a="http://schemas.openxmlformats.org/drawingml/2006/main" idx="2">
-            <a:schemeClr val="accent1">
-              <a:shade val="50000"/>
-            </a:schemeClr>
-          </a:lnRef>
-          <a:fillRef xmlns:a="http://schemas.openxmlformats.org/drawingml/2006/main" idx="1">
-            <a:schemeClr val="accent1"/>
-          </a:fillRef>
-          <a:effectRef xmlns:a="http://schemas.openxmlformats.org/drawingml/2006/main" idx="0">
-            <a:schemeClr val="accent1"/>
-          </a:effectRef>
-          <a:fontRef xmlns:a="http://schemas.openxmlformats.org/drawingml/2006/main" idx="minor">
-            <a:schemeClr val="lt1"/>
-          </a:fontRef>
-        </p:style>
-        <p:txBody>
-          <a:bodyPr xmlns:a="http://schemas.openxmlformats.org/drawingml/2006/main" anchor="ctr"/>
-          <a:lstStyle xmlns:a="http://schemas.openxmlformats.org/drawingml/2006/main"/>
-          <a:p xmlns:a="http://schemas.openxmlformats.org/drawingml/2006/main">
-            <a:pPr algn="ctr">
-              <a:buNone/>
-            </a:pPr>
-            <a:endParaRPr/>
-          </a:p>
-        </p:txBody>
-      </p:sp>
-      <p:sp>
-        <p:nvSpPr>
-          <p:cNvPr id="9" name="Rounded Rectangle 8">
-            <a:extLst xmlns:a="http://schemas.openxmlformats.org/drawingml/2006/main">
-              <a:ext uri="{FF2B5EF4-FFF2-40B4-BE49-F238E27FC236}">
-                <a16:creationId xmlns:a16="http://schemas.microsoft.com/office/drawing/2014/main" id="{AF7FF946-F2C7-D6E7-161B-FE79175B6C6F}"/>
-              </a:ext>
-            </a:extLst>
-          </p:cNvPr>
-          <p:cNvSpPr>
-            <a:spLocks xmlns:a="http://schemas.openxmlformats.org/drawingml/2006/main" noGrp="1"/>
-          </p:cNvSpPr>
-          <p:nvPr/>
-        </p:nvSpPr>
-        <p:spPr>
-          <a:xfrm xmlns:a="http://schemas.openxmlformats.org/drawingml/2006/main">
-            <a:off x="9563757" y="4163170"/>
-            <a:ext cx="1387365" cy="1250730"/>
-          </a:xfrm>
-          <a:prstGeom xmlns:a="http://schemas.openxmlformats.org/drawingml/2006/main" prst="roundRect">
-            <a:avLst/>
-          </a:prstGeom>
-          <a:solidFill xmlns:a="http://schemas.openxmlformats.org/drawingml/2006/main">
-            <a:schemeClr val="tx1"/>
-          </a:solidFill>
-          <a:ln xmlns:a="http://schemas.openxmlformats.org/drawingml/2006/main">
-            <a:noFill/>
-          </a:ln>
-        </p:spPr>
-        <p:style>
-          <a:lnRef xmlns:a="http://schemas.openxmlformats.org/drawingml/2006/main" idx="2">
-            <a:schemeClr val="accent1">
-              <a:shade val="50000"/>
-            </a:schemeClr>
-          </a:lnRef>
-          <a:fillRef xmlns:a="http://schemas.openxmlformats.org/drawingml/2006/main" idx="1">
-            <a:schemeClr val="accent1"/>
-          </a:fillRef>
-          <a:effectRef xmlns:a="http://schemas.openxmlformats.org/drawingml/2006/main" idx="0">
-            <a:schemeClr val="accent1"/>
-          </a:effectRef>
-          <a:fontRef xmlns:a="http://schemas.openxmlformats.org/drawingml/2006/main" idx="minor">
-            <a:schemeClr val="lt1"/>
-          </a:fontRef>
-        </p:style>
-        <p:txBody>
-          <a:bodyPr xmlns:a="http://schemas.openxmlformats.org/drawingml/2006/main" anchor="ctr"/>
-          <a:lstStyle xmlns:a="http://schemas.openxmlformats.org/drawingml/2006/main"/>
-          <a:p xmlns:a="http://schemas.openxmlformats.org/drawingml/2006/main">
-            <a:pPr algn="ctr">
-              <a:buNone/>
-            </a:pPr>
-            <a:endParaRPr/>
-          </a:p>
-        </p:txBody>
-      </p:sp>
-      <p:sp>
-        <p:nvSpPr>
-          <p:cNvPr id="10" name="Rounded Rectangle 9">
-            <a:extLst xmlns:a="http://schemas.openxmlformats.org/drawingml/2006/main">
-              <a:ext uri="{FF2B5EF4-FFF2-40B4-BE49-F238E27FC236}">
-                <a16:creationId xmlns:a16="http://schemas.microsoft.com/office/drawing/2014/main" id="{C140F6C2-AD7C-88D0-87DF-51C8BE95E9C3}"/>
-              </a:ext>
-            </a:extLst>
-          </p:cNvPr>
-          <p:cNvSpPr>
-            <a:spLocks xmlns:a="http://schemas.openxmlformats.org/drawingml/2006/main" noGrp="1"/>
-          </p:cNvSpPr>
-          <p:nvPr/>
-        </p:nvSpPr>
-        <p:spPr>
-          <a:xfrm xmlns:a="http://schemas.openxmlformats.org/drawingml/2006/main">
-            <a:off x="7966513" y="4163170"/>
-            <a:ext cx="1387365" cy="1250730"/>
-          </a:xfrm>
-          <a:prstGeom xmlns:a="http://schemas.openxmlformats.org/drawingml/2006/main" prst="roundRect">
-            <a:avLst/>
-          </a:prstGeom>
-          <a:solidFill xmlns:a="http://schemas.openxmlformats.org/drawingml/2006/main">
-            <a:schemeClr val="bg1"/>
-          </a:solidFill>
-          <a:ln xmlns:a="http://schemas.openxmlformats.org/drawingml/2006/main">
-            <a:solidFill>
-              <a:schemeClr val="tx1"/>
-            </a:solidFill>
-          </a:ln>
-        </p:spPr>
-        <p:style>
-          <a:lnRef xmlns:a="http://schemas.openxmlformats.org/drawingml/2006/main" idx="2">
-            <a:schemeClr val="accent1">
-              <a:shade val="50000"/>
-            </a:schemeClr>
-          </a:lnRef>
-          <a:fillRef xmlns:a="http://schemas.openxmlformats.org/drawingml/2006/main" idx="1">
-            <a:schemeClr val="accent1"/>
-          </a:fillRef>
-          <a:effectRef xmlns:a="http://schemas.openxmlformats.org/drawingml/2006/main" idx="0">
-            <a:schemeClr val="accent1"/>
-          </a:effectRef>
-          <a:fontRef xmlns:a="http://schemas.openxmlformats.org/drawingml/2006/main" idx="minor">
-            <a:schemeClr val="lt1"/>
-          </a:fontRef>
-        </p:style>
-        <p:txBody>
-          <a:bodyPr xmlns:a="http://schemas.openxmlformats.org/drawingml/2006/main" anchor="ctr"/>
-          <a:lstStyle xmlns:a="http://schemas.openxmlformats.org/drawingml/2006/main"/>
-          <a:p xmlns:a="http://schemas.openxmlformats.org/drawingml/2006/main">
-            <a:pPr algn="ctr">
-              <a:buNone/>
-            </a:pPr>
-            <a:endParaRPr/>
-          </a:p>
-        </p:txBody>
-      </p:sp>
-      <p:sp>
-        <p:nvSpPr>
-          <p:cNvPr id="11" name="TextBox 10">
-            <a:extLst xmlns:a="http://schemas.openxmlformats.org/drawingml/2006/main">
-              <a:ext uri="{FF2B5EF4-FFF2-40B4-BE49-F238E27FC236}">
-                <a16:creationId xmlns:a16="http://schemas.microsoft.com/office/drawing/2014/main" id="{A34A167C-C9ED-83B6-37A6-61E69ABB4413}"/>
-              </a:ext>
-            </a:extLst>
-          </p:cNvPr>
-          <p:cNvSpPr>
-            <a:spLocks xmlns:a="http://schemas.openxmlformats.org/drawingml/2006/main" noGrp="1"/>
-          </p:cNvSpPr>
-          <p:nvPr/>
-        </p:nvSpPr>
-        <p:spPr>
-          <a:xfrm xmlns:a="http://schemas.openxmlformats.org/drawingml/2006/main">
-            <a:off x="6768661" y="3059668"/>
-            <a:ext cx="987973" cy="1188720"/>
+            <a:off x="1360238" y="3611687"/>
+            <a:ext cx="6722075" cy="1554480"/>
           </a:xfrm>
           <a:prstGeom xmlns:a="http://schemas.openxmlformats.org/drawingml/2006/main" prst="rect">
             <a:avLst/>
@@ -5774,422 +4856,54 @@
           <a:lstStyle xmlns:a="http://schemas.openxmlformats.org/drawingml/2006/main"/>
           <a:p xmlns:a="http://schemas.openxmlformats.org/drawingml/2006/main">
             <a:r>
-              <a:rPr b="1">
-                <a:solidFill>
-                  <a:schemeClr val="bg1"/>
-                </a:solidFill>
+              <a:rPr sz="2400">
                 <a:latin typeface="Apex New Light"/>
                 <a:ea typeface="Apex New Light"/>
                 <a:cs typeface="Apex New Light"/>
               </a:rPr>
-              <a:t>THE FOUR SECTIONS</a:t>
-            </a:r>
-          </a:p>
-        </p:txBody>
-      </p:sp>
-      <p:sp>
-        <p:nvSpPr>
-          <p:cNvPr id="12" name="TextBox 11">
-            <a:extLst xmlns:a="http://schemas.openxmlformats.org/drawingml/2006/main">
-              <a:ext uri="{FF2B5EF4-FFF2-40B4-BE49-F238E27FC236}">
-                <a16:creationId xmlns:a16="http://schemas.microsoft.com/office/drawing/2014/main" id="{51154096-614E-C989-8729-B4EF0C035B9D}"/>
-              </a:ext>
-            </a:extLst>
-          </p:cNvPr>
-          <p:cNvSpPr>
-            <a:spLocks xmlns:a="http://schemas.openxmlformats.org/drawingml/2006/main" noGrp="1"/>
-          </p:cNvSpPr>
-          <p:nvPr/>
-        </p:nvSpPr>
-        <p:spPr>
-          <a:xfrm xmlns:a="http://schemas.openxmlformats.org/drawingml/2006/main">
-            <a:off x="8166208" y="2960799"/>
-            <a:ext cx="987973" cy="646331"/>
-          </a:xfrm>
-          <a:prstGeom xmlns:a="http://schemas.openxmlformats.org/drawingml/2006/main" prst="rect">
-            <a:avLst/>
-          </a:prstGeom>
-          <a:noFill xmlns:a="http://schemas.openxmlformats.org/drawingml/2006/main"/>
-        </p:spPr>
-        <p:txBody>
-          <a:bodyPr xmlns:a="http://schemas.openxmlformats.org/drawingml/2006/main" wrap="square">
-            <a:spAutoFit/>
-          </a:bodyPr>
-          <a:lstStyle xmlns:a="http://schemas.openxmlformats.org/drawingml/2006/main"/>
-          <a:p xmlns:a="http://schemas.openxmlformats.org/drawingml/2006/main">
-            <a:pPr algn="ctr">
-              <a:buNone/>
+              <a:t>Section 1: The Foundation</a:t>
+            </a:r>
+          </a:p>
+          <a:p xmlns:a="http://schemas.openxmlformats.org/drawingml/2006/main">
+            <a:pPr marL="342900" indent="-342900">
+              <a:buFont typeface="Arial"/>
+              <a:buChar char="•"/>
             </a:pPr>
             <a:r>
-              <a:rPr b="1">
-                <a:solidFill>
-                  <a:schemeClr val="bg1"/>
-                </a:solidFill>
+              <a:rPr sz="2400">
                 <a:latin typeface="Apex New Light"/>
                 <a:ea typeface="Apex New Light"/>
                 <a:cs typeface="Apex New Light"/>
               </a:rPr>
-              <a:t>FOUNDATION</a:t>
-            </a:r>
-          </a:p>
-        </p:txBody>
-      </p:sp>
-      <p:sp>
-        <p:nvSpPr>
-          <p:cNvPr id="13" name="TextBox 12">
-            <a:extLst xmlns:a="http://schemas.openxmlformats.org/drawingml/2006/main">
-              <a:ext uri="{FF2B5EF4-FFF2-40B4-BE49-F238E27FC236}">
-                <a16:creationId xmlns:a16="http://schemas.microsoft.com/office/drawing/2014/main" id="{A13FDAB1-1936-AF1F-D3A4-2CD634E994D9}"/>
-              </a:ext>
-            </a:extLst>
-          </p:cNvPr>
-          <p:cNvSpPr>
-            <a:spLocks xmlns:a="http://schemas.openxmlformats.org/drawingml/2006/main" noGrp="1"/>
-          </p:cNvSpPr>
-          <p:nvPr/>
-        </p:nvSpPr>
-        <p:spPr>
-          <a:xfrm xmlns:a="http://schemas.openxmlformats.org/drawingml/2006/main">
-            <a:off x="9763452" y="2966892"/>
-            <a:ext cx="987973" cy="646331"/>
-          </a:xfrm>
-          <a:prstGeom xmlns:a="http://schemas.openxmlformats.org/drawingml/2006/main" prst="rect">
-            <a:avLst/>
-          </a:prstGeom>
-          <a:noFill xmlns:a="http://schemas.openxmlformats.org/drawingml/2006/main"/>
-        </p:spPr>
-        <p:txBody>
-          <a:bodyPr xmlns:a="http://schemas.openxmlformats.org/drawingml/2006/main" wrap="square">
-            <a:spAutoFit/>
-          </a:bodyPr>
-          <a:lstStyle xmlns:a="http://schemas.openxmlformats.org/drawingml/2006/main"/>
-          <a:p xmlns:a="http://schemas.openxmlformats.org/drawingml/2006/main">
-            <a:pPr algn="ctr">
-              <a:buNone/>
+              <a:t>Section 2: The Brand</a:t>
+            </a:r>
+          </a:p>
+          <a:p xmlns:a="http://schemas.openxmlformats.org/drawingml/2006/main">
+            <a:pPr marL="342900" indent="-342900">
+              <a:buFont typeface="Arial"/>
+              <a:buChar char="•"/>
             </a:pPr>
             <a:r>
-              <a:rPr b="1">
-                <a:solidFill>
-                  <a:schemeClr val="bg1"/>
-                </a:solidFill>
+              <a:rPr sz="2400">
                 <a:latin typeface="Apex New Light"/>
                 <a:ea typeface="Apex New Light"/>
                 <a:cs typeface="Apex New Light"/>
               </a:rPr>
-              <a:t>BRAND</a:t>
-            </a:r>
-          </a:p>
-        </p:txBody>
-      </p:sp>
-      <p:sp>
-        <p:nvSpPr>
-          <p:cNvPr id="14" name="TextBox 13">
-            <a:extLst xmlns:a="http://schemas.openxmlformats.org/drawingml/2006/main">
-              <a:ext uri="{FF2B5EF4-FFF2-40B4-BE49-F238E27FC236}">
-                <a16:creationId xmlns:a16="http://schemas.microsoft.com/office/drawing/2014/main" id="{DCAA5633-D112-FD9D-3F76-079E158E54AF}"/>
-              </a:ext>
-            </a:extLst>
-          </p:cNvPr>
-          <p:cNvSpPr>
-            <a:spLocks xmlns:a="http://schemas.openxmlformats.org/drawingml/2006/main" noGrp="1"/>
-          </p:cNvSpPr>
-          <p:nvPr/>
-        </p:nvSpPr>
-        <p:spPr>
-          <a:xfrm xmlns:a="http://schemas.openxmlformats.org/drawingml/2006/main">
-            <a:off x="9763452" y="4603869"/>
-            <a:ext cx="987973" cy="640080"/>
-          </a:xfrm>
-          <a:prstGeom xmlns:a="http://schemas.openxmlformats.org/drawingml/2006/main" prst="rect">
-            <a:avLst/>
-          </a:prstGeom>
-          <a:noFill xmlns:a="http://schemas.openxmlformats.org/drawingml/2006/main"/>
-        </p:spPr>
-        <p:txBody>
-          <a:bodyPr xmlns:a="http://schemas.openxmlformats.org/drawingml/2006/main" wrap="square">
-            <a:spAutoFit/>
-          </a:bodyPr>
-          <a:lstStyle xmlns:a="http://schemas.openxmlformats.org/drawingml/2006/main"/>
-          <a:p xmlns:a="http://schemas.openxmlformats.org/drawingml/2006/main">
-            <a:pPr algn="ctr">
-              <a:buNone/>
+              <a:t>Section 3: The Customer</a:t>
+            </a:r>
+          </a:p>
+          <a:p xmlns:a="http://schemas.openxmlformats.org/drawingml/2006/main">
+            <a:pPr marL="342900" indent="-342900">
+              <a:buFont typeface="Arial"/>
+              <a:buChar char="•"/>
             </a:pPr>
             <a:r>
-              <a:rPr b="1">
-                <a:solidFill>
-                  <a:schemeClr val="bg1"/>
-                </a:solidFill>
+              <a:rPr sz="2400">
                 <a:latin typeface="Apex New Light"/>
                 <a:ea typeface="Apex New Light"/>
                 <a:cs typeface="Apex New Light"/>
               </a:rPr>
-              <a:t>CUSTOMER</a:t>
-            </a:r>
-          </a:p>
-        </p:txBody>
-      </p:sp>
-      <p:sp>
-        <p:nvSpPr>
-          <p:cNvPr id="15" name="TextBox 14">
-            <a:extLst xmlns:a="http://schemas.openxmlformats.org/drawingml/2006/main">
-              <a:ext uri="{FF2B5EF4-FFF2-40B4-BE49-F238E27FC236}">
-                <a16:creationId xmlns:a16="http://schemas.microsoft.com/office/drawing/2014/main" id="{F8CB4720-324D-8C3E-2E8A-25F61D1EDE54}"/>
-              </a:ext>
-            </a:extLst>
-          </p:cNvPr>
-          <p:cNvSpPr>
-            <a:spLocks xmlns:a="http://schemas.openxmlformats.org/drawingml/2006/main" noGrp="1"/>
-          </p:cNvSpPr>
-          <p:nvPr/>
-        </p:nvSpPr>
-        <p:spPr>
-          <a:xfrm xmlns:a="http://schemas.openxmlformats.org/drawingml/2006/main">
-            <a:off x="8166207" y="4603869"/>
-            <a:ext cx="987973" cy="369332"/>
-          </a:xfrm>
-          <a:prstGeom xmlns:a="http://schemas.openxmlformats.org/drawingml/2006/main" prst="rect">
-            <a:avLst/>
-          </a:prstGeom>
-          <a:noFill xmlns:a="http://schemas.openxmlformats.org/drawingml/2006/main"/>
-        </p:spPr>
-        <p:txBody>
-          <a:bodyPr xmlns:a="http://schemas.openxmlformats.org/drawingml/2006/main" wrap="square">
-            <a:spAutoFit/>
-          </a:bodyPr>
-          <a:lstStyle xmlns:a="http://schemas.openxmlformats.org/drawingml/2006/main"/>
-          <a:p xmlns:a="http://schemas.openxmlformats.org/drawingml/2006/main">
-            <a:pPr algn="ctr">
-              <a:buNone/>
-            </a:pPr>
-            <a:r>
-              <a:rPr b="1">
-                <a:latin typeface="Apex New Light"/>
-                <a:ea typeface="Apex New Light"/>
-                <a:cs typeface="Apex New Light"/>
-              </a:rPr>
-              <a:t>GOALS</a:t>
-            </a:r>
-          </a:p>
-        </p:txBody>
-      </p:sp>
-      <p:sp>
-        <p:nvSpPr>
-          <p:cNvPr id="16" name="TextBox 15">
-            <a:extLst xmlns:a="http://schemas.openxmlformats.org/drawingml/2006/main">
-              <a:ext uri="{FF2B5EF4-FFF2-40B4-BE49-F238E27FC236}">
-                <a16:creationId xmlns:a16="http://schemas.microsoft.com/office/drawing/2014/main" id="{58458717-3573-9ED3-BA32-93D7742E2BB2}"/>
-              </a:ext>
-            </a:extLst>
-          </p:cNvPr>
-          <p:cNvSpPr>
-            <a:spLocks xmlns:a="http://schemas.openxmlformats.org/drawingml/2006/main" noGrp="1"/>
-          </p:cNvSpPr>
-          <p:nvPr/>
-        </p:nvSpPr>
-        <p:spPr>
-          <a:xfrm xmlns:a="http://schemas.openxmlformats.org/drawingml/2006/main">
-            <a:off x="6568964" y="4465369"/>
-            <a:ext cx="987973" cy="646331"/>
-          </a:xfrm>
-          <a:prstGeom xmlns:a="http://schemas.openxmlformats.org/drawingml/2006/main" prst="rect">
-            <a:avLst/>
-          </a:prstGeom>
-          <a:noFill xmlns:a="http://schemas.openxmlformats.org/drawingml/2006/main"/>
-        </p:spPr>
-        <p:txBody>
-          <a:bodyPr xmlns:a="http://schemas.openxmlformats.org/drawingml/2006/main" wrap="square">
-            <a:spAutoFit/>
-          </a:bodyPr>
-          <a:lstStyle xmlns:a="http://schemas.openxmlformats.org/drawingml/2006/main"/>
-          <a:p xmlns:a="http://schemas.openxmlformats.org/drawingml/2006/main">
-            <a:pPr algn="ctr">
-              <a:buNone/>
-            </a:pPr>
-            <a:r>
-              <a:rPr b="1">
-                <a:latin typeface="Apex New Light"/>
-                <a:ea typeface="Apex New Light"/>
-                <a:cs typeface="Apex New Light"/>
-              </a:rPr>
-              <a:t/>
-            </a:r>
-          </a:p>
-        </p:txBody>
-      </p:sp>
-      <p:sp>
-        <p:nvSpPr>
-          <p:cNvPr id="17" name="TextBox 16">
-            <a:extLst xmlns:a="http://schemas.openxmlformats.org/drawingml/2006/main">
-              <a:ext uri="{FF2B5EF4-FFF2-40B4-BE49-F238E27FC236}">
-                <a16:creationId xmlns:a16="http://schemas.microsoft.com/office/drawing/2014/main" id="{B6088B3E-5D6C-03E3-A8DB-61E87148EF9C}"/>
-              </a:ext>
-            </a:extLst>
-          </p:cNvPr>
-          <p:cNvSpPr>
-            <a:spLocks xmlns:a="http://schemas.openxmlformats.org/drawingml/2006/main" noGrp="1"/>
-          </p:cNvSpPr>
-          <p:nvPr/>
-        </p:nvSpPr>
-        <p:spPr>
-          <a:xfrm xmlns:a="http://schemas.openxmlformats.org/drawingml/2006/main">
-            <a:off x="438698" y="1347216"/>
-            <a:ext cx="2670667" cy="369332"/>
-          </a:xfrm>
-          <a:prstGeom xmlns:a="http://schemas.openxmlformats.org/drawingml/2006/main" prst="rect">
-            <a:avLst/>
-          </a:prstGeom>
-          <a:noFill xmlns:a="http://schemas.openxmlformats.org/drawingml/2006/main"/>
-        </p:spPr>
-        <p:txBody>
-          <a:bodyPr xmlns:a="http://schemas.openxmlformats.org/drawingml/2006/main" wrap="square">
-            <a:spAutoFit/>
-          </a:bodyPr>
-          <a:lstStyle xmlns:a="http://schemas.openxmlformats.org/drawingml/2006/main"/>
-          <a:p xmlns:a="http://schemas.openxmlformats.org/drawingml/2006/main">
-            <a:r>
-              <a:rPr b="1">
-                <a:solidFill>
-                  <a:schemeClr val="bg2">
-                    <a:lumMod val="75000"/>
-                  </a:schemeClr>
-                </a:solidFill>
-                <a:latin typeface="Century Gothic"/>
-                <a:ea typeface="Century Gothic"/>
-                <a:cs typeface="Century Gothic"/>
-              </a:rPr>
-              <a:t/>
-            </a:r>
-          </a:p>
-        </p:txBody>
-      </p:sp>
-      <p:sp>
-        <p:nvSpPr>
-          <p:cNvPr id="19" name="Straight Connector 18">
-            <a:extLst xmlns:a="http://schemas.openxmlformats.org/drawingml/2006/main">
-              <a:ext uri="{FF2B5EF4-FFF2-40B4-BE49-F238E27FC236}">
-                <a16:creationId xmlns:a16="http://schemas.microsoft.com/office/drawing/2014/main" id="{123C0109-10C1-42A7-9AAA-214C279B0380}"/>
-              </a:ext>
-            </a:extLst>
-          </p:cNvPr>
-          <p:cNvSpPr>
-            <a:spLocks xmlns:a="http://schemas.openxmlformats.org/drawingml/2006/main" noGrp="1"/>
-          </p:cNvSpPr>
-          <p:nvPr/>
-        </p:nvSpPr>
-        <p:spPr>
-          <a:xfrm xmlns:a="http://schemas.openxmlformats.org/drawingml/2006/main">
-            <a:off x="546538" y="1006366"/>
-            <a:ext cx="10699531" cy="0"/>
-          </a:xfrm>
-          <a:prstGeom xmlns:a="http://schemas.openxmlformats.org/drawingml/2006/main" prst="line">
-            <a:avLst/>
-          </a:prstGeom>
-          <a:ln xmlns:a="http://schemas.openxmlformats.org/drawingml/2006/main">
-            <a:solidFill>
-              <a:schemeClr val="bg2"/>
-            </a:solidFill>
-          </a:ln>
-        </p:spPr>
-        <p:style>
-          <a:lnRef xmlns:a="http://schemas.openxmlformats.org/drawingml/2006/main" idx="1">
-            <a:schemeClr val="accent1"/>
-          </a:lnRef>
-          <a:fillRef xmlns:a="http://schemas.openxmlformats.org/drawingml/2006/main" idx="0">
-            <a:schemeClr val="accent1"/>
-          </a:fillRef>
-          <a:effectRef xmlns:a="http://schemas.openxmlformats.org/drawingml/2006/main" idx="0">
-            <a:schemeClr val="accent1"/>
-          </a:effectRef>
-          <a:fontRef xmlns:a="http://schemas.openxmlformats.org/drawingml/2006/main" idx="minor">
-            <a:schemeClr val="tx1"/>
-          </a:fontRef>
-        </p:style>
-      </p:sp>
-      <p:sp>
-        <p:nvSpPr>
-          <p:cNvPr id="20" name="Straight Connector 19">
-            <a:extLst xmlns:a="http://schemas.openxmlformats.org/drawingml/2006/main">
-              <a:ext uri="{FF2B5EF4-FFF2-40B4-BE49-F238E27FC236}">
-                <a16:creationId xmlns:a16="http://schemas.microsoft.com/office/drawing/2014/main" id="{A052BE2C-EEBE-42B7-B62F-A0ABD5DE9888}"/>
-              </a:ext>
-            </a:extLst>
-          </p:cNvPr>
-          <p:cNvSpPr>
-            <a:spLocks xmlns:a="http://schemas.openxmlformats.org/drawingml/2006/main" noGrp="1"/>
-          </p:cNvSpPr>
-          <p:nvPr/>
-        </p:nvSpPr>
-        <p:spPr>
-          <a:xfrm xmlns:a="http://schemas.openxmlformats.org/drawingml/2006/main">
-            <a:off x="546537" y="1810408"/>
-            <a:ext cx="10699531" cy="0"/>
-          </a:xfrm>
-          <a:prstGeom xmlns:a="http://schemas.openxmlformats.org/drawingml/2006/main" prst="line">
-            <a:avLst/>
-          </a:prstGeom>
-          <a:ln xmlns:a="http://schemas.openxmlformats.org/drawingml/2006/main">
-            <a:solidFill>
-              <a:schemeClr val="bg2"/>
-            </a:solidFill>
-          </a:ln>
-        </p:spPr>
-        <p:style>
-          <a:lnRef xmlns:a="http://schemas.openxmlformats.org/drawingml/2006/main" idx="1">
-            <a:schemeClr val="accent1"/>
-          </a:lnRef>
-          <a:fillRef xmlns:a="http://schemas.openxmlformats.org/drawingml/2006/main" idx="0">
-            <a:schemeClr val="accent1"/>
-          </a:fillRef>
-          <a:effectRef xmlns:a="http://schemas.openxmlformats.org/drawingml/2006/main" idx="0">
-            <a:schemeClr val="accent1"/>
-          </a:effectRef>
-          <a:fontRef xmlns:a="http://schemas.openxmlformats.org/drawingml/2006/main" idx="minor">
-            <a:schemeClr val="tx1"/>
-          </a:fontRef>
-        </p:style>
-      </p:sp>
-      <p:sp>
-        <p:nvSpPr>
-          <p:cNvPr id="21" name="TextBox 20">
-            <a:extLst xmlns:a="http://schemas.openxmlformats.org/drawingml/2006/main">
-              <a:ext uri="{FF2B5EF4-FFF2-40B4-BE49-F238E27FC236}">
-                <a16:creationId xmlns:a16="http://schemas.microsoft.com/office/drawing/2014/main" id="{443D671F-9BD1-AA81-584C-A4C38C920948}"/>
-              </a:ext>
-            </a:extLst>
-          </p:cNvPr>
-          <p:cNvSpPr>
-            <a:spLocks xmlns:a="http://schemas.openxmlformats.org/drawingml/2006/main" noGrp="1"/>
-          </p:cNvSpPr>
-          <p:nvPr/>
-        </p:nvSpPr>
-        <p:spPr>
-          <a:xfrm xmlns:a="http://schemas.openxmlformats.org/drawingml/2006/main">
-            <a:off x="6221603" y="1379907"/>
-            <a:ext cx="2670667" cy="369332"/>
-          </a:xfrm>
-          <a:prstGeom xmlns:a="http://schemas.openxmlformats.org/drawingml/2006/main" prst="rect">
-            <a:avLst/>
-          </a:prstGeom>
-          <a:noFill xmlns:a="http://schemas.openxmlformats.org/drawingml/2006/main"/>
-        </p:spPr>
-        <p:txBody>
-          <a:bodyPr xmlns:a="http://schemas.openxmlformats.org/drawingml/2006/main" wrap="square">
-            <a:spAutoFit/>
-          </a:bodyPr>
-          <a:lstStyle xmlns:a="http://schemas.openxmlformats.org/drawingml/2006/main"/>
-          <a:p xmlns:a="http://schemas.openxmlformats.org/drawingml/2006/main">
-            <a:r>
-              <a:rPr b="1">
-                <a:solidFill>
-                  <a:schemeClr val="bg2">
-                    <a:lumMod val="75000"/>
-                  </a:schemeClr>
-                </a:solidFill>
-                <a:latin typeface="Century Gothic"/>
-                <a:ea typeface="Century Gothic"/>
-                <a:cs typeface="Century Gothic"/>
-              </a:rPr>
-              <a:t/>
+              <a:t>Section 4: Digital Marketing Campaign Goals</a:t>
             </a:r>
           </a:p>
         </p:txBody>
@@ -6197,7 +4911,7 @@
     </p:spTree>
     <p:extLst>
       <p:ext uri="{BB962C8B-B14F-4D97-AF65-F5344CB8AC3E}">
-        <p14:creationId xmlns:p14="http://schemas.microsoft.com/office/powerpoint/2010/main" val="1625175788"/>
+        <p14:creationId xmlns:p14="http://schemas.microsoft.com/office/powerpoint/2010/main" val="4178694944"/>
       </p:ext>
     </p:extLst>
   </p:cSld>
@@ -6261,7 +4975,7 @@
                 <a:ea typeface="Century Gothic"/>
                 <a:cs typeface="Century Gothic"/>
               </a:rPr>
-              <a:t>SECTION 1 — THE FOUNDATION</a:t>
+              <a:t>SECTION 1: THE FOUNDATION</a:t>
             </a:r>
           </a:p>
         </p:txBody>
@@ -6308,7 +5022,7 @@
                 <a:ea typeface="Adobe Garamond Pro Bold"/>
                 <a:cs typeface="Adobe Garamond Pro Bold"/>
               </a:rPr>
-              <a:t>Strong digital strategy starts with clarity about the brand, the customer, and the goal.</a:t>
+              <a:t>Brand, customer, and goals form the base of the strategy.</a:t>
             </a:r>
           </a:p>
         </p:txBody>
@@ -6335,72 +5049,6 @@
       <p:grpSpPr>
         <a:xfrm xmlns:a="http://schemas.openxmlformats.org/drawingml/2006/main"/>
       </p:grpSpPr>
-      <p:pic>
-        <p:nvPicPr>
-          <p:cNvPr id="14" name="Picture 4"/>
-          <p:cNvPicPr>
-            <a:picLocks xmlns:a="http://schemas.openxmlformats.org/drawingml/2006/main" noChangeAspect="1"/>
-          </p:cNvPicPr>
-          <p:nvPr/>
-        </p:nvPicPr>
-        <p:blipFill>
-          <a:blip xmlns:r="http://schemas.openxmlformats.org/officeDocument/2006/relationships" xmlns:a="http://schemas.openxmlformats.org/drawingml/2006/main" r:embed="R69b052de8fb74e83"/>
-          <a:stretch xmlns:a="http://schemas.openxmlformats.org/drawingml/2006/main"/>
-        </p:blipFill>
-        <p:spPr>
-          <a:xfrm xmlns:a="http://schemas.openxmlformats.org/drawingml/2006/main">
-            <a:off x="6191828" y="148646"/>
-            <a:ext cx="4603783" cy="3452837"/>
-          </a:xfrm>
-          <a:prstGeom xmlns:a="http://schemas.openxmlformats.org/drawingml/2006/main" prst="rect">
-            <a:avLst/>
-          </a:prstGeom>
-        </p:spPr>
-      </p:pic>
-      <p:pic>
-        <p:nvPicPr>
-          <p:cNvPr id="15" name="Picture 5"/>
-          <p:cNvPicPr>
-            <a:picLocks xmlns:a="http://schemas.openxmlformats.org/drawingml/2006/main" noChangeAspect="1"/>
-          </p:cNvPicPr>
-          <p:nvPr/>
-        </p:nvPicPr>
-        <p:blipFill>
-          <a:blip xmlns:r="http://schemas.openxmlformats.org/officeDocument/2006/relationships" xmlns:a="http://schemas.openxmlformats.org/drawingml/2006/main" r:embed="Rfde8f2c6cad44cb8"/>
-          <a:stretch xmlns:a="http://schemas.openxmlformats.org/drawingml/2006/main"/>
-        </p:blipFill>
-        <p:spPr>
-          <a:xfrm xmlns:a="http://schemas.openxmlformats.org/drawingml/2006/main">
-            <a:off x="9144945" y="3730034"/>
-            <a:ext cx="2300061" cy="2300061"/>
-          </a:xfrm>
-          <a:prstGeom xmlns:a="http://schemas.openxmlformats.org/drawingml/2006/main" prst="rect">
-            <a:avLst/>
-          </a:prstGeom>
-        </p:spPr>
-      </p:pic>
-      <p:pic>
-        <p:nvPicPr>
-          <p:cNvPr id="16" name="Picture 6"/>
-          <p:cNvPicPr>
-            <a:picLocks xmlns:a="http://schemas.openxmlformats.org/drawingml/2006/main" noChangeAspect="1"/>
-          </p:cNvPicPr>
-          <p:nvPr/>
-        </p:nvPicPr>
-        <p:blipFill>
-          <a:blip xmlns:r="http://schemas.openxmlformats.org/officeDocument/2006/relationships" xmlns:a="http://schemas.openxmlformats.org/drawingml/2006/main" r:embed="R59fed953d9594836"/>
-          <a:stretch xmlns:a="http://schemas.openxmlformats.org/drawingml/2006/main"/>
-        </p:blipFill>
-        <p:spPr>
-          <a:xfrm xmlns:a="http://schemas.openxmlformats.org/drawingml/2006/main">
-            <a:off x="5142130" y="3730034"/>
-            <a:ext cx="3066748" cy="2300061"/>
-          </a:xfrm>
-          <a:prstGeom xmlns:a="http://schemas.openxmlformats.org/drawingml/2006/main" prst="rect">
-            <a:avLst/>
-          </a:prstGeom>
-        </p:spPr>
-      </p:pic>
       <p:sp>
         <p:nvSpPr>
           <p:cNvPr id="8" name="TextBox 7">
@@ -6440,7 +5088,7 @@
                 <a:ea typeface="Century Gothic"/>
                 <a:cs typeface="Century Gothic"/>
               </a:rPr>
-              <a:t>THE FOUNDATION</a:t>
+              <a:t>FOUNDATION</a:t>
             </a:r>
             <a:endParaRPr sz="5000" b="1">
               <a:solidFill>
@@ -6489,69 +5137,27 @@
                 <a:ea typeface="Apex New Book"/>
                 <a:cs typeface="Apex New Book"/>
               </a:rPr>
-              <a:t>Before choosing tactics, define:</a:t>
-            </a:r>
-          </a:p>
-          <a:p xmlns:a="http://schemas.openxmlformats.org/drawingml/2006/main">
-            <a:pPr marL="285750" indent="-285750">
-              <a:buFont typeface="Arial"/>
-              <a:buChar char="•"/>
-            </a:pPr>
-            <a:r>
-              <a:rPr>
-                <a:latin typeface="Apex New Book"/>
-                <a:ea typeface="Apex New Book"/>
-                <a:cs typeface="Apex New Book"/>
-              </a:rPr>
-              <a:t>What the organization stands for</a:t>
-            </a:r>
-          </a:p>
-          <a:p xmlns:a="http://schemas.openxmlformats.org/drawingml/2006/main">
-            <a:pPr marL="285750" indent="-285750">
-              <a:buFont typeface="Arial"/>
-              <a:buChar char="•"/>
-            </a:pPr>
-            <a:r>
-              <a:rPr>
-                <a:latin typeface="Apex New Book"/>
-                <a:ea typeface="Apex New Book"/>
-                <a:cs typeface="Apex New Book"/>
-              </a:rPr>
-              <a:t>Who the customer is</a:t>
-            </a:r>
-          </a:p>
-          <a:p xmlns:a="http://schemas.openxmlformats.org/drawingml/2006/main">
-            <a:pPr marL="285750" indent="-285750">
-              <a:buFont typeface="Arial"/>
-              <a:buChar char="•"/>
-            </a:pPr>
-            <a:r>
-              <a:rPr>
-                <a:latin typeface="Apex New Book"/>
-                <a:ea typeface="Apex New Book"/>
-                <a:cs typeface="Apex New Book"/>
-              </a:rPr>
-              <a:t>What the campaign must accomplish</a:t>
+              <a:t>Before choosing tactics, define what the organization stands for, who the customer is, and what the campaign must accomplish.</a:t>
             </a:r>
           </a:p>
         </p:txBody>
       </p:sp>
       <p:pic>
         <p:nvPicPr>
-          <p:cNvPr id="19" name=""/>
+          <p:cNvPr id="13" name=""/>
           <p:cNvPicPr>
             <a:picLocks xmlns:a="http://schemas.openxmlformats.org/drawingml/2006/main" noChangeAspect="1"/>
           </p:cNvPicPr>
           <p:nvPr/>
         </p:nvPicPr>
         <p:blipFill>
-          <a:blip xmlns:r="http://schemas.openxmlformats.org/officeDocument/2006/relationships" xmlns:a="http://schemas.openxmlformats.org/drawingml/2006/main" r:embed="R38eb2e7e65a24dc6"/>
+          <a:blip xmlns:r="http://schemas.openxmlformats.org/officeDocument/2006/relationships" xmlns:a="http://schemas.openxmlformats.org/drawingml/2006/main" r:embed="R985616c899874dc8"/>
           <a:stretch xmlns:a="http://schemas.openxmlformats.org/drawingml/2006/main"/>
         </p:blipFill>
         <p:spPr>
           <a:xfrm xmlns:a="http://schemas.openxmlformats.org/drawingml/2006/main">
-            <a:off x="4953000" y="571500"/>
-            <a:ext cx="6858000" cy="5143500"/>
+            <a:off x="6000750" y="1012031"/>
+            <a:ext cx="5619750" cy="4214813"/>
           </a:xfrm>
           <a:prstGeom xmlns:a="http://schemas.openxmlformats.org/drawingml/2006/main" prst="rect">
             <a:avLst/>
@@ -6597,7 +5203,7 @@
         <p:spPr>
           <a:xfrm xmlns:a="http://schemas.openxmlformats.org/drawingml/2006/main">
             <a:off x="506626" y="430118"/>
-            <a:ext cx="10625199" cy="861774"/>
+            <a:ext cx="10625199" cy="1615440"/>
           </a:xfrm>
           <a:prstGeom xmlns:a="http://schemas.openxmlformats.org/drawingml/2006/main" prst="rect">
             <a:avLst/>
@@ -6619,98 +5225,8 @@
                 <a:ea typeface="Century Gothic"/>
                 <a:cs typeface="Century Gothic"/>
               </a:rPr>
-              <a:t>ONE FOUNDATION</a:t>
-            </a:r>
-          </a:p>
-        </p:txBody>
-      </p:sp>
-      <p:sp>
-        <p:nvSpPr>
-          <p:cNvPr id="6" name="TextBox 5">
-            <a:extLst xmlns:a="http://schemas.openxmlformats.org/drawingml/2006/main">
-              <a:ext uri="{FF2B5EF4-FFF2-40B4-BE49-F238E27FC236}">
-                <a16:creationId xmlns:a16="http://schemas.microsoft.com/office/drawing/2014/main" id="{2F224D25-900A-CB0D-31E1-F5F0798768B3}"/>
-              </a:ext>
-            </a:extLst>
-          </p:cNvPr>
-          <p:cNvSpPr>
-            <a:spLocks xmlns:a="http://schemas.openxmlformats.org/drawingml/2006/main" noGrp="1"/>
-          </p:cNvSpPr>
-          <p:nvPr/>
-        </p:nvSpPr>
-        <p:spPr>
-          <a:xfrm xmlns:a="http://schemas.openxmlformats.org/drawingml/2006/main">
-            <a:off x="506623" y="1260709"/>
-            <a:ext cx="10823981" cy="861774"/>
-          </a:xfrm>
-          <a:prstGeom xmlns:a="http://schemas.openxmlformats.org/drawingml/2006/main" prst="rect">
-            <a:avLst/>
-          </a:prstGeom>
-          <a:noFill xmlns:a="http://schemas.openxmlformats.org/drawingml/2006/main"/>
-        </p:spPr>
-        <p:txBody>
-          <a:bodyPr xmlns:a="http://schemas.openxmlformats.org/drawingml/2006/main" wrap="square">
-            <a:spAutoFit/>
-          </a:bodyPr>
-          <a:lstStyle xmlns:a="http://schemas.openxmlformats.org/drawingml/2006/main"/>
-          <a:p xmlns:a="http://schemas.openxmlformats.org/drawingml/2006/main">
-            <a:r>
-              <a:rPr sz="5000" b="1" spc="-150">
-                <a:solidFill>
-                  <a:srgbClr val="00637C"/>
-                </a:solidFill>
-                <a:latin typeface="Century Gothic"/>
-                <a:ea typeface="Century Gothic"/>
-                <a:cs typeface="Century Gothic"/>
-              </a:rPr>
-              <a:t>MANY CHANNELS</a:t>
-            </a:r>
-          </a:p>
-        </p:txBody>
-      </p:sp>
-      <p:sp>
-        <p:nvSpPr>
-          <p:cNvPr id="7" name="TextBox 6">
-            <a:extLst xmlns:a="http://schemas.openxmlformats.org/drawingml/2006/main">
-              <a:ext uri="{FF2B5EF4-FFF2-40B4-BE49-F238E27FC236}">
-                <a16:creationId xmlns:a16="http://schemas.microsoft.com/office/drawing/2014/main" id="{787FD0A2-94F3-0018-D150-0CD40EE2A0A3}"/>
-              </a:ext>
-            </a:extLst>
-          </p:cNvPr>
-          <p:cNvSpPr>
-            <a:spLocks xmlns:a="http://schemas.openxmlformats.org/drawingml/2006/main" noGrp="1"/>
-          </p:cNvSpPr>
-          <p:nvPr/>
-        </p:nvSpPr>
-        <p:spPr>
-          <a:xfrm xmlns:a="http://schemas.openxmlformats.org/drawingml/2006/main">
-            <a:off x="506622" y="2073418"/>
-            <a:ext cx="10823982" cy="861774"/>
-          </a:xfrm>
-          <a:prstGeom xmlns:a="http://schemas.openxmlformats.org/drawingml/2006/main" prst="rect">
-            <a:avLst/>
-          </a:prstGeom>
-          <a:noFill xmlns:a="http://schemas.openxmlformats.org/drawingml/2006/main"/>
-        </p:spPr>
-        <p:txBody>
-          <a:bodyPr xmlns:a="http://schemas.openxmlformats.org/drawingml/2006/main" wrap="square">
-            <a:spAutoFit/>
-          </a:bodyPr>
-          <a:lstStyle xmlns:a="http://schemas.openxmlformats.org/drawingml/2006/main"/>
-          <a:p xmlns:a="http://schemas.openxmlformats.org/drawingml/2006/main">
-            <a:r>
-              <a:rPr sz="5000" b="1" spc="-150">
-                <a:latin typeface="Century Gothic"/>
-                <a:ea typeface="Century Gothic"/>
-                <a:cs typeface="Century Gothic"/>
-              </a:rPr>
-              <a:t>CONSISTENT STRATEGY</a:t>
-            </a:r>
-            <a:endParaRPr sz="5000" b="1" spc="-150">
-              <a:latin typeface="Century Gothic"/>
-              <a:ea typeface="Century Gothic"/>
-              <a:cs typeface="Century Gothic"/>
-            </a:endParaRPr>
+              <a:t>THE FOUNDATION GUIDES EVERY CHANNEL</a:t>
+            </a:r>
           </a:p>
         </p:txBody>
       </p:sp>
@@ -6731,7 +5247,7 @@
         <p:spPr>
           <a:xfrm xmlns:a="http://schemas.openxmlformats.org/drawingml/2006/main">
             <a:off x="1360238" y="3611687"/>
-            <a:ext cx="6722075" cy="1920240"/>
+            <a:ext cx="6722075" cy="1200329"/>
           </a:xfrm>
           <a:prstGeom xmlns:a="http://schemas.openxmlformats.org/drawingml/2006/main" prst="rect">
             <a:avLst/>
@@ -6750,7 +5266,7 @@
                 <a:ea typeface="Apex New Light"/>
                 <a:cs typeface="Apex New Light"/>
               </a:rPr>
-              <a:t>These decisions shape every execution:</a:t>
+              <a:t>Brand clarity shapes the message.</a:t>
             </a:r>
           </a:p>
           <a:p xmlns:a="http://schemas.openxmlformats.org/drawingml/2006/main">
@@ -6764,7 +5280,7 @@
                 <a:ea typeface="Apex New Light"/>
                 <a:cs typeface="Apex New Light"/>
               </a:rPr>
-              <a:t>Website and landing pages</a:t>
+              <a:t>Customer insight shapes the experience.</a:t>
             </a:r>
           </a:p>
           <a:p xmlns:a="http://schemas.openxmlformats.org/drawingml/2006/main">
@@ -6778,35 +5294,7 @@
                 <a:ea typeface="Apex New Light"/>
                 <a:cs typeface="Apex New Light"/>
               </a:rPr>
-              <a:t>SEO and content</a:t>
-            </a:r>
-          </a:p>
-          <a:p xmlns:a="http://schemas.openxmlformats.org/drawingml/2006/main">
-            <a:pPr marL="342900" indent="-342900">
-              <a:buFont typeface="Arial"/>
-              <a:buChar char="•"/>
-            </a:pPr>
-            <a:r>
-              <a:rPr sz="2400">
-                <a:latin typeface="Apex New Light"/>
-                <a:ea typeface="Apex New Light"/>
-                <a:cs typeface="Apex New Light"/>
-              </a:rPr>
-              <a:t>Social media and digital ads</a:t>
-            </a:r>
-          </a:p>
-          <a:p xmlns:a="http://schemas.openxmlformats.org/drawingml/2006/main">
-            <a:pPr marL="342900" indent="-342900">
-              <a:buFont typeface="Arial"/>
-              <a:buChar char="•"/>
-            </a:pPr>
-            <a:r>
-              <a:rPr sz="2400">
-                <a:latin typeface="Apex New Light"/>
-                <a:ea typeface="Apex New Light"/>
-                <a:cs typeface="Apex New Light"/>
-              </a:rPr>
-              <a:t>Email marketing</a:t>
+              <a:t>Campaign goals define what success looks like.</a:t>
             </a:r>
           </a:p>
         </p:txBody>
@@ -6879,7 +5367,7 @@
                 <a:ea typeface="Century Gothic"/>
                 <a:cs typeface="Century Gothic"/>
               </a:rPr>
-              <a:t>SECTION 2 — THE BRAND</a:t>
+              <a:t>SECTION 2: THE BRAND</a:t>
             </a:r>
           </a:p>
         </p:txBody>
@@ -6926,7 +5414,7 @@
                 <a:ea typeface="Adobe Garamond Pro Bold"/>
                 <a:cs typeface="Adobe Garamond Pro Bold"/>
               </a:rPr>
-              <a:t>Purpose, position, and identity give the brand a clear place in the customer’s mind.</a:t>
+              <a:t>Mission, positioning, and identity clarify what the brand represents.</a:t>
             </a:r>
             <a:endParaRPr sz="2800" b="1" i="1">
               <a:solidFill>
@@ -7000,98 +5488,8 @@
                 <a:ea typeface="Century Gothic"/>
                 <a:cs typeface="Century Gothic"/>
               </a:rPr>
-              <a:t>MISSION</a:t>
-            </a:r>
-          </a:p>
-        </p:txBody>
-      </p:sp>
-      <p:sp>
-        <p:nvSpPr>
-          <p:cNvPr id="6" name="TextBox 5">
-            <a:extLst xmlns:a="http://schemas.openxmlformats.org/drawingml/2006/main">
-              <a:ext uri="{FF2B5EF4-FFF2-40B4-BE49-F238E27FC236}">
-                <a16:creationId xmlns:a16="http://schemas.microsoft.com/office/drawing/2014/main" id="{2F224D25-900A-CB0D-31E1-F5F0798768B3}"/>
-              </a:ext>
-            </a:extLst>
-          </p:cNvPr>
-          <p:cNvSpPr>
-            <a:spLocks xmlns:a="http://schemas.openxmlformats.org/drawingml/2006/main" noGrp="1"/>
-          </p:cNvSpPr>
-          <p:nvPr/>
-        </p:nvSpPr>
-        <p:spPr>
-          <a:xfrm xmlns:a="http://schemas.openxmlformats.org/drawingml/2006/main">
-            <a:off x="506623" y="1260709"/>
-            <a:ext cx="10823981" cy="861774"/>
-          </a:xfrm>
-          <a:prstGeom xmlns:a="http://schemas.openxmlformats.org/drawingml/2006/main" prst="rect">
-            <a:avLst/>
-          </a:prstGeom>
-          <a:noFill xmlns:a="http://schemas.openxmlformats.org/drawingml/2006/main"/>
-        </p:spPr>
-        <p:txBody>
-          <a:bodyPr xmlns:a="http://schemas.openxmlformats.org/drawingml/2006/main" wrap="square">
-            <a:spAutoFit/>
-          </a:bodyPr>
-          <a:lstStyle xmlns:a="http://schemas.openxmlformats.org/drawingml/2006/main"/>
-          <a:p xmlns:a="http://schemas.openxmlformats.org/drawingml/2006/main">
-            <a:r>
-              <a:rPr sz="5000" b="1" spc="-150">
-                <a:solidFill>
-                  <a:srgbClr val="00637C"/>
-                </a:solidFill>
-                <a:latin typeface="Century Gothic"/>
-                <a:ea typeface="Century Gothic"/>
-                <a:cs typeface="Century Gothic"/>
-              </a:rPr>
-              <a:t>PURPOSE</a:t>
-            </a:r>
-          </a:p>
-        </p:txBody>
-      </p:sp>
-      <p:sp>
-        <p:nvSpPr>
-          <p:cNvPr id="7" name="TextBox 6">
-            <a:extLst xmlns:a="http://schemas.openxmlformats.org/drawingml/2006/main">
-              <a:ext uri="{FF2B5EF4-FFF2-40B4-BE49-F238E27FC236}">
-                <a16:creationId xmlns:a16="http://schemas.microsoft.com/office/drawing/2014/main" id="{787FD0A2-94F3-0018-D150-0CD40EE2A0A3}"/>
-              </a:ext>
-            </a:extLst>
-          </p:cNvPr>
-          <p:cNvSpPr>
-            <a:spLocks xmlns:a="http://schemas.openxmlformats.org/drawingml/2006/main" noGrp="1"/>
-          </p:cNvSpPr>
-          <p:nvPr/>
-        </p:nvSpPr>
-        <p:spPr>
-          <a:xfrm xmlns:a="http://schemas.openxmlformats.org/drawingml/2006/main">
-            <a:off x="506622" y="2073418"/>
-            <a:ext cx="10823982" cy="861774"/>
-          </a:xfrm>
-          <a:prstGeom xmlns:a="http://schemas.openxmlformats.org/drawingml/2006/main" prst="rect">
-            <a:avLst/>
-          </a:prstGeom>
-          <a:noFill xmlns:a="http://schemas.openxmlformats.org/drawingml/2006/main"/>
-        </p:spPr>
-        <p:txBody>
-          <a:bodyPr xmlns:a="http://schemas.openxmlformats.org/drawingml/2006/main" wrap="square">
-            <a:spAutoFit/>
-          </a:bodyPr>
-          <a:lstStyle xmlns:a="http://schemas.openxmlformats.org/drawingml/2006/main"/>
-          <a:p xmlns:a="http://schemas.openxmlformats.org/drawingml/2006/main">
-            <a:r>
-              <a:rPr sz="5000" b="1" spc="-150">
-                <a:latin typeface="Century Gothic"/>
-                <a:ea typeface="Century Gothic"/>
-                <a:cs typeface="Century Gothic"/>
-              </a:rPr>
-              <a:t>DIRECTION</a:t>
-            </a:r>
-            <a:endParaRPr sz="5000" b="1" spc="-150">
-              <a:latin typeface="Century Gothic"/>
-              <a:ea typeface="Century Gothic"/>
-              <a:cs typeface="Century Gothic"/>
-            </a:endParaRPr>
+              <a:t>MISSION STATEMENT</a:t>
+            </a:r>
           </a:p>
         </p:txBody>
       </p:sp>
@@ -7131,7 +5529,7 @@
                 <a:ea typeface="Apex New Light"/>
                 <a:cs typeface="Apex New Light"/>
               </a:rPr>
-              <a:t>A mission statement explains why the organization exists and what it seeks to contribute.</a:t>
+              <a:t>The mission explains why the organization exists and what it seeks to contribute.</a:t>
             </a:r>
           </a:p>
           <a:p xmlns:a="http://schemas.openxmlformats.org/drawingml/2006/main">
@@ -7145,7 +5543,7 @@
                 <a:ea typeface="Apex New Light"/>
                 <a:cs typeface="Apex New Light"/>
               </a:rPr>
-              <a:t>It guides content, messaging, and decisions so the brand communicates with one voice.</a:t>
+              <a:t>It guides content, messages, and business decisions.</a:t>
             </a:r>
           </a:p>
         </p:txBody>
@@ -7177,7 +5575,7 @@
           <p:cNvPr id="4" name="TextBox 3">
             <a:extLst xmlns:a="http://schemas.openxmlformats.org/drawingml/2006/main">
               <a:ext uri="{FF2B5EF4-FFF2-40B4-BE49-F238E27FC236}">
-                <a16:creationId xmlns:a16="http://schemas.microsoft.com/office/drawing/2014/main" id="{C7B19C96-5D82-012F-8729-3E6D9E53B949}"/>
+                <a16:creationId xmlns:a16="http://schemas.microsoft.com/office/drawing/2014/main" id="{CC6A4120-A6E9-C201-2822-99E980DEAA23}"/>
               </a:ext>
             </a:extLst>
           </p:cNvPr>
@@ -7188,8 +5586,8 @@
         </p:nvSpPr>
         <p:spPr>
           <a:xfrm xmlns:a="http://schemas.openxmlformats.org/drawingml/2006/main">
-            <a:off x="803190" y="407773"/>
-            <a:ext cx="5609967" cy="1615440"/>
+            <a:off x="506626" y="430118"/>
+            <a:ext cx="10625199" cy="861774"/>
           </a:xfrm>
           <a:prstGeom xmlns:a="http://schemas.openxmlformats.org/drawingml/2006/main" prst="rect">
             <a:avLst/>
@@ -7203,9 +5601,9 @@
           <a:lstStyle xmlns:a="http://schemas.openxmlformats.org/drawingml/2006/main"/>
           <a:p xmlns:a="http://schemas.openxmlformats.org/drawingml/2006/main">
             <a:r>
-              <a:rPr sz="5000" b="1">
+              <a:rPr sz="5000" b="1" spc="-150">
                 <a:solidFill>
-                  <a:srgbClr val="00637C"/>
+                  <a:schemeClr val="accent2"/>
                 </a:solidFill>
                 <a:latin typeface="Century Gothic"/>
                 <a:ea typeface="Century Gothic"/>
@@ -7218,10 +5616,10 @@
       </p:sp>
       <p:sp>
         <p:nvSpPr>
-          <p:cNvPr id="5" name="TextBox 4">
+          <p:cNvPr id="8" name="TextBox 7">
             <a:extLst xmlns:a="http://schemas.openxmlformats.org/drawingml/2006/main">
               <a:ext uri="{FF2B5EF4-FFF2-40B4-BE49-F238E27FC236}">
-                <a16:creationId xmlns:a16="http://schemas.microsoft.com/office/drawing/2014/main" id="{F511E7B9-E7CA-19FE-E051-E69B2B8DF370}"/>
+                <a16:creationId xmlns:a16="http://schemas.microsoft.com/office/drawing/2014/main" id="{158774D9-74C1-3786-BA30-6C2B11D8E6B7}"/>
               </a:ext>
             </a:extLst>
           </p:cNvPr>
@@ -7232,8 +5630,8 @@
         </p:nvSpPr>
         <p:spPr>
           <a:xfrm xmlns:a="http://schemas.openxmlformats.org/drawingml/2006/main">
-            <a:off x="2478593" y="2589357"/>
-            <a:ext cx="7705929" cy="1798320"/>
+            <a:off x="1360238" y="3611687"/>
+            <a:ext cx="6722075" cy="1200329"/>
           </a:xfrm>
           <a:prstGeom xmlns:a="http://schemas.openxmlformats.org/drawingml/2006/main" prst="rect">
             <a:avLst/>
@@ -7246,35 +5644,21 @@
           </a:bodyPr>
           <a:lstStyle xmlns:a="http://schemas.openxmlformats.org/drawingml/2006/main"/>
           <a:p xmlns:a="http://schemas.openxmlformats.org/drawingml/2006/main">
-            <a:pPr algn="ctr">
-              <a:buNone/>
-            </a:pPr>
-            <a:r>
-              <a:rPr sz="2800" b="1">
-                <a:solidFill>
-                  <a:srgbClr val="00637C"/>
-                </a:solidFill>
-                <a:latin typeface="Adobe Garamond Pro Bold"/>
-                <a:ea typeface="Adobe Garamond Pro Bold"/>
-                <a:cs typeface="Adobe Garamond Pro Bold"/>
+            <a:r>
+              <a:rPr sz="2400">
+                <a:latin typeface="Apex New Light"/>
+                <a:ea typeface="Apex New Light"/>
+                <a:cs typeface="Apex New Light"/>
               </a:rPr>
               <a:t>For [target audience], [product or service] is [concise description]. It is ideal for [best use or application] because [primary benefit or differentiation].</a:t>
             </a:r>
-            <a:endParaRPr sz="2800" b="1" i="1">
-              <a:solidFill>
-                <a:srgbClr val="00637C"/>
-              </a:solidFill>
-              <a:latin typeface="Adobe Garamond Pro Bold"/>
-              <a:ea typeface="Adobe Garamond Pro Bold"/>
-              <a:cs typeface="Adobe Garamond Pro Bold"/>
-            </a:endParaRPr>
           </a:p>
         </p:txBody>
       </p:sp>
     </p:spTree>
     <p:extLst>
       <p:ext uri="{BB962C8B-B14F-4D97-AF65-F5344CB8AC3E}">
-        <p14:creationId xmlns:p14="http://schemas.microsoft.com/office/powerpoint/2010/main" val="3521556503"/>
+        <p14:creationId xmlns:p14="http://schemas.microsoft.com/office/powerpoint/2010/main" val="4178694944"/>
       </p:ext>
     </p:extLst>
   </p:cSld>
